--- a/morning-report/handouts/Morning_Report_Presenter_Template.pptx
+++ b/morning-report/handouts/Morning_Report_Presenter_Template.pptx
@@ -4,6 +4,9 @@
   <p:sldMasterIdLst>
     <p:sldMasterId id="2147483648" r:id="rId1"/>
   </p:sldMasterIdLst>
+  <p:notesMasterIdLst>
+    <p:notesMasterId r:id="rId11"/>
+  </p:notesMasterIdLst>
   <p:sldIdLst>
     <p:sldId id="256" r:id="rId2"/>
     <p:sldId id="257" r:id="rId3"/>
@@ -15,9 +18,6 @@
     <p:sldId id="263" r:id="rId9"/>
     <p:sldId id="264" r:id="rId10"/>
   </p:sldIdLst>
-  <p:notesMasterIdLst>
-    <p:notesMasterId r:id="rId11"/>
-  </p:notesMasterIdLst>
   <p:sldSz cx="12192000" cy="6858000"/>
   <p:notesSz cx="6858000" cy="12192000"/>
   <p:defaultTextStyle>
@@ -112,6 +112,11 @@
       </a:defRPr>
     </a:lvl9pPr>
   </p:defaultTextStyle>
+  <p:extLst>
+    <p:ext uri="{EFAFB233-063F-42B5-8137-9DF3F51BA10A}">
+      <p15:sldGuideLst xmlns:p15="http://schemas.microsoft.com/office/powerpoint/2012/main"/>
+    </p:ext>
+  </p:extLst>
 </p:presentation>
 </file>
 
@@ -137,234 +142,10 @@
           <a:chExt cx="0" cy="0"/>
         </a:xfrm>
       </p:grpSpPr>
-      <p:sp>
-        <p:nvSpPr>
-          <p:cNvPr id="2" name="Header Placeholder 1"/>
-          <p:cNvSpPr>
-            <a:spLocks noGrp="1"/>
-          </p:cNvSpPr>
-          <p:nvPr>
-            <p:ph type="hdr" sz="quarter"/>
-          </p:nvPr>
-        </p:nvSpPr>
-        <p:spPr>
-          <a:xfrm>
-            <a:off x="0" y="0"/>
-            <a:ext cx="2971800" cy="458788"/>
-          </a:xfrm>
-          <a:prstGeom prst="rect">
-            <a:avLst/>
-          </a:prstGeom>
-        </p:spPr>
-        <p:txBody>
-          <a:bodyPr vert="horz" lIns="91440" tIns="45720" rIns="91440" bIns="45720" rtlCol="0"/>
-          <a:lstStyle>
-            <a:lvl1pPr algn="l">
-              <a:defRPr sz="1200"/>
-            </a:lvl1pPr>
-          </a:lstStyle>
-          <a:p>
-            <a:endParaRPr lang="en-US"/>
-          </a:p>
-        </p:txBody>
-      </p:sp>
-      <p:sp>
-        <p:nvSpPr>
-          <p:cNvPr id="3" name="Date Placeholder 2"/>
-          <p:cNvSpPr>
-            <a:spLocks noGrp="1"/>
-          </p:cNvSpPr>
-          <p:nvPr>
-            <p:ph type="dt" idx="1"/>
-          </p:nvPr>
-        </p:nvSpPr>
-        <p:spPr>
-          <a:xfrm>
-            <a:off x="3884613" y="0"/>
-            <a:ext cx="2971800" cy="458788"/>
-          </a:xfrm>
-          <a:prstGeom prst="rect">
-            <a:avLst/>
-          </a:prstGeom>
-        </p:spPr>
-        <p:txBody>
-          <a:bodyPr vert="horz" lIns="91440" tIns="45720" rIns="91440" bIns="45720" rtlCol="0"/>
-          <a:lstStyle>
-            <a:lvl1pPr algn="r">
-              <a:defRPr sz="1200"/>
-            </a:lvl1pPr>
-          </a:lstStyle>
-          <a:p>
-            <a:fld id="{5282F153-3F37-0F45-9E97-73ACFA13230C}" type="datetimeFigureOut">
-              <a:rPr lang="en-US"/>
-              <a:t>7/23/19</a:t>
-            </a:fld>
-            <a:endParaRPr lang="en-US"/>
-          </a:p>
-        </p:txBody>
-      </p:sp>
-      <p:sp>
-        <p:nvSpPr>
-          <p:cNvPr id="4" name="Slide Image Placeholder 3"/>
-          <p:cNvSpPr>
-            <a:spLocks noGrp="1" noRot="1" noChangeAspect="1"/>
-          </p:cNvSpPr>
-          <p:nvPr>
-            <p:ph type="sldImg" idx="2"/>
-          </p:nvPr>
-        </p:nvSpPr>
-        <p:spPr>
-          <a:xfrm>
-            <a:off x="685800" y="1143000"/>
-            <a:ext cx="5486400" cy="3086100"/>
-          </a:xfrm>
-          <a:prstGeom prst="rect">
-            <a:avLst/>
-          </a:prstGeom>
-          <a:noFill/>
-          <a:ln w="12700">
-            <a:solidFill>
-              <a:prstClr val="black"/>
-            </a:solidFill>
-          </a:ln>
-        </p:spPr>
-        <p:txBody>
-          <a:bodyPr vert="horz" lIns="91440" tIns="45720" rIns="91440" bIns="45720" rtlCol="0" anchor="ctr"/>
-          <a:lstStyle/>
-          <a:p>
-            <a:endParaRPr lang="en-US"/>
-          </a:p>
-        </p:txBody>
-      </p:sp>
-      <p:sp>
-        <p:nvSpPr>
-          <p:cNvPr id="5" name="Notes Placeholder 4"/>
-          <p:cNvSpPr>
-            <a:spLocks noGrp="1"/>
-          </p:cNvSpPr>
-          <p:nvPr>
-            <p:ph type="body" sz="quarter" idx="3"/>
-          </p:nvPr>
-        </p:nvSpPr>
-        <p:spPr>
-          <a:xfrm>
-            <a:off x="685800" y="4400550"/>
-            <a:ext cx="5486400" cy="3600450"/>
-          </a:xfrm>
-          <a:prstGeom prst="rect">
-            <a:avLst/>
-          </a:prstGeom>
-        </p:spPr>
-        <p:txBody>
-          <a:bodyPr vert="horz" lIns="91440" tIns="45720" rIns="91440" bIns="45720" rtlCol="0"/>
-          <a:lstStyle/>
-          <a:p>
-            <a:pPr lvl="0"/>
-            <a:r>
-              <a:rPr lang="en-US"/>
-              <a:t>Click to edit Master text styles</a:t>
-            </a:r>
-          </a:p>
-          <a:p>
-            <a:pPr lvl="1"/>
-            <a:r>
-              <a:rPr lang="en-US"/>
-              <a:t>Second level</a:t>
-            </a:r>
-          </a:p>
-          <a:p>
-            <a:pPr lvl="2"/>
-            <a:r>
-              <a:rPr lang="en-US"/>
-              <a:t>Third level</a:t>
-            </a:r>
-          </a:p>
-          <a:p>
-            <a:pPr lvl="3"/>
-            <a:r>
-              <a:rPr lang="en-US"/>
-              <a:t>Fourth level</a:t>
-            </a:r>
-          </a:p>
-          <a:p>
-            <a:pPr lvl="4"/>
-            <a:r>
-              <a:rPr lang="en-US"/>
-              <a:t>Fifth level</a:t>
-            </a:r>
-          </a:p>
-        </p:txBody>
-      </p:sp>
-      <p:sp>
-        <p:nvSpPr>
-          <p:cNvPr id="6" name="Footer Placeholder 5"/>
-          <p:cNvSpPr>
-            <a:spLocks noGrp="1"/>
-          </p:cNvSpPr>
-          <p:nvPr>
-            <p:ph type="ftr" sz="quarter" idx="4"/>
-          </p:nvPr>
-        </p:nvSpPr>
-        <p:spPr>
-          <a:xfrm>
-            <a:off x="0" y="8685213"/>
-            <a:ext cx="2971800" cy="458787"/>
-          </a:xfrm>
-          <a:prstGeom prst="rect">
-            <a:avLst/>
-          </a:prstGeom>
-        </p:spPr>
-        <p:txBody>
-          <a:bodyPr vert="horz" lIns="91440" tIns="45720" rIns="91440" bIns="45720" rtlCol="0" anchor="b"/>
-          <a:lstStyle>
-            <a:lvl1pPr algn="l">
-              <a:defRPr sz="1200"/>
-            </a:lvl1pPr>
-          </a:lstStyle>
-          <a:p>
-            <a:endParaRPr lang="en-US"/>
-          </a:p>
-        </p:txBody>
-      </p:sp>
-      <p:sp>
-        <p:nvSpPr>
-          <p:cNvPr id="7" name="Slide Number Placeholder 6"/>
-          <p:cNvSpPr>
-            <a:spLocks noGrp="1"/>
-          </p:cNvSpPr>
-          <p:nvPr>
-            <p:ph type="sldNum" sz="quarter" idx="5"/>
-          </p:nvPr>
-        </p:nvSpPr>
-        <p:spPr>
-          <a:xfrm>
-            <a:off x="3884613" y="8685213"/>
-            <a:ext cx="2971800" cy="458787"/>
-          </a:xfrm>
-          <a:prstGeom prst="rect">
-            <a:avLst/>
-          </a:prstGeom>
-        </p:spPr>
-        <p:txBody>
-          <a:bodyPr vert="horz" lIns="91440" tIns="45720" rIns="91440" bIns="45720" rtlCol="0" anchor="b"/>
-          <a:lstStyle>
-            <a:lvl1pPr algn="r">
-              <a:defRPr sz="1200"/>
-            </a:lvl1pPr>
-          </a:lstStyle>
-          <a:p>
-            <a:fld id="{CE5E9CC1-C706-0F49-92D6-E571CC5EEA8F}" type="slidenum">
-              <a:rPr lang="en-US"/>
-              <a:t>‹#›</a:t>
-            </a:fld>
-            <a:endParaRPr lang="en-US"/>
-          </a:p>
-        </p:txBody>
-      </p:sp>
     </p:spTree>
     <p:extLst>
       <p:ext uri="{BB962C8B-B14F-4D97-AF65-F5344CB8AC3E}">
-        <p14:creationId xmlns:p14="http://schemas.microsoft.com/office/powerpoint/2010/main" val="1024086991"/>
+        <p14:creationId xmlns:p14="http://schemas.microsoft.com/office/powerpoint/2010/main" val="678771042"/>
       </p:ext>
     </p:extLst>
   </p:cSld>
@@ -512,7 +293,6 @@
               <a:rPr lang="en-US" dirty="0"/>
               <a:t>Send the one-liner to both discussants 24 hours ahead. Send the objective to the whiteboard scribe. Test the screen-share handoff once before the day of.</a:t>
             </a:r>
-            <a:endParaRPr lang="en-US" dirty="0"/>
           </a:p>
         </p:txBody>
       </p:sp>
@@ -600,7 +380,6 @@
               <a:rPr lang="en-US" dirty="0"/>
               <a:t>0:00 — This slide is up before anyone joins. The facilitator names the four roles and reads the objective aloud. That objective is the contract for the session and the thing faculty ties back to at the end.</a:t>
             </a:r>
-            <a:endParaRPr lang="en-US" dirty="0"/>
           </a:p>
         </p:txBody>
       </p:sp>
@@ -688,7 +467,6 @@
               <a:rPr lang="en-US" dirty="0"/>
               <a:t>Open here, not with demographics. Drop the group into the most challenging moment of the patient's narrative — the ED call, the abnormal gas, the child who looked well an hour ago. Keep a poker face: no tone or pacing tells.</a:t>
             </a:r>
-            <a:endParaRPr lang="en-US" dirty="0"/>
           </a:p>
         </p:txBody>
       </p:sp>
@@ -776,7 +554,6 @@
               <a:rPr lang="en-US" dirty="0"/>
               <a:t>One screen. If it needs two, some of it belongs in the second block or does not belong at all. Answer the questions asked, volunteer nothing. Hand the share to the scribe when the facilitator calls 0:07.</a:t>
             </a:r>
-            <a:endParaRPr lang="en-US" dirty="0"/>
           </a:p>
         </p:txBody>
       </p:sp>
@@ -864,7 +641,6 @@
               <a:rPr lang="en-US" dirty="0"/>
               <a:t>Deliberately content-free. Its only job is to make the handoff to the board unambiguous and to buy the group ten seconds of silence. Let the silence run. Do not fill it, and do not let faculty fill it.</a:t>
             </a:r>
-            <a:endParaRPr lang="en-US" dirty="0"/>
           </a:p>
         </p:txBody>
       </p:sp>
@@ -952,7 +728,6 @@
               <a:rPr lang="en-US" dirty="0"/>
               <a:t>0:16 — The scribe strikes refuted items in red as the group reacts. Draw a line across the board here: everything above it was reasoning without these results. Paste imaging in place of the table row if a picture is the point.</a:t>
             </a:r>
-            <a:endParaRPr lang="en-US" dirty="0"/>
           </a:p>
         </p:txBody>
       </p:sp>
@@ -1040,7 +815,6 @@
               <a:rPr lang="en-US" dirty="0"/>
               <a:t>Second handoff. This is where the red strike-throughs happen and where the board earns its keep. Faculty comes in at 0:19 with one point, not a lecture.</a:t>
             </a:r>
-            <a:endParaRPr lang="en-US" dirty="0"/>
           </a:p>
         </p:txBody>
       </p:sp>
@@ -1128,7 +902,6 @@
               <a:rPr lang="en-US" dirty="0"/>
               <a:t>The amber row is the one that matters. Naming the reasoning error — not the diagnosis — is the thing residents carry to the next patient. Ask two people by name what they would have needed to see earlier.</a:t>
             </a:r>
-            <a:endParaRPr lang="en-US" dirty="0"/>
           </a:p>
         </p:txBody>
       </p:sp>
@@ -1216,7 +989,6 @@
               <a:rPr lang="en-US" dirty="0"/>
               <a:t>0:24 — Read the points aloud, tied back to the objective. The scribe exports the board and posts it. Send the one-liner, diagnosis, takeaways and board question to the case bank the same day — that is what the six-month review game runs on.</a:t>
             </a:r>
-            <a:endParaRPr lang="en-US" dirty="0"/>
           </a:p>
         </p:txBody>
       </p:sp>
@@ -1289,6 +1061,11 @@
 <file path=ppt/slideMasters/slideMaster1.xml><?xml version="1.0" encoding="utf-8"?>
 <p:sldMaster xmlns:a="http://schemas.openxmlformats.org/drawingml/2006/main" xmlns:r="http://schemas.openxmlformats.org/officeDocument/2006/relationships" xmlns:p="http://schemas.openxmlformats.org/presentationml/2006/main">
   <p:cSld>
+    <p:bg>
+      <p:bgRef idx="1001">
+        <a:schemeClr val="bg1"/>
+      </p:bgRef>
+    </p:bg>
     <p:spTree>
       <p:nvGrpSpPr>
         <p:cNvPr id="1" name=""/>
@@ -1571,6 +1348,7 @@
         <a:solidFill>
           <a:srgbClr val="FFFFFF"/>
         </a:solidFill>
+        <a:effectLst/>
       </p:bgPr>
     </p:bg>
     <p:spTree>
@@ -1608,11 +1386,11 @@
           <a:bodyPr wrap="square" lIns="0" tIns="0" rIns="0" bIns="0" rtlCol="0" anchor="ctr"/>
           <a:lstStyle/>
           <a:p>
-            <a:pPr indent="0" marL="0">
+            <a:pPr marL="0" indent="0">
               <a:buNone/>
             </a:pPr>
             <a:r>
-              <a:rPr lang="en-US" sz="1100" b="1" spc="200" kern="0" dirty="0">
+              <a:rPr lang="en-US" sz="1100" b="1" kern="0" spc="200" dirty="0">
                 <a:solidFill>
                   <a:srgbClr val="E8A33D"/>
                 </a:solidFill>
@@ -1647,7 +1425,7 @@
           <a:bodyPr wrap="square" lIns="0" tIns="0" rIns="0" bIns="0" rtlCol="0" anchor="ctr"/>
           <a:lstStyle/>
           <a:p>
-            <a:pPr indent="0" marL="0">
+            <a:pPr marL="0" indent="0">
               <a:buNone/>
             </a:pPr>
             <a:r>
@@ -1686,7 +1464,7 @@
           <a:bodyPr wrap="square" lIns="0" tIns="0" rIns="0" bIns="0" rtlCol="0" anchor="ctr"/>
           <a:lstStyle/>
           <a:p>
-            <a:pPr indent="0" marL="0">
+            <a:pPr marL="0" indent="0">
               <a:buNone/>
             </a:pPr>
             <a:r>
@@ -1706,7 +1484,7 @@
       </p:sp>
       <p:graphicFrame>
         <p:nvGraphicFramePr>
-          <p:cNvPr id="2" name="Table 0"/>
+          <p:cNvPr id="5" name="Table 0"/>
           <p:cNvGraphicFramePr>
             <a:graphicFrameLocks noGrp="1"/>
           </p:cNvGraphicFramePr>
@@ -1720,17 +1498,41 @@
         </p:nvGraphicFramePr>
         <p:xfrm>
           <a:off x="566928" y="1691640"/>
-          <a:ext cx="11055096" cy="914400"/>
+          <a:ext cx="11055096" cy="3621024"/>
         </p:xfrm>
         <a:graphic>
           <a:graphicData uri="http://schemas.openxmlformats.org/drawingml/2006/table">
             <a:tbl>
               <a:tblPr/>
               <a:tblGrid>
-                <a:gridCol w="457200"/>
-                <a:gridCol w="2377440"/>
-                <a:gridCol w="914400"/>
-                <a:gridCol w="7306056"/>
+                <a:gridCol w="457200">
+                  <a:extLst>
+                    <a:ext uri="{9D8B030D-6E8A-4147-A177-3AD203B41FA5}">
+                      <a16:colId xmlns:a16="http://schemas.microsoft.com/office/drawing/2014/main" val="20000"/>
+                    </a:ext>
+                  </a:extLst>
+                </a:gridCol>
+                <a:gridCol w="2377440">
+                  <a:extLst>
+                    <a:ext uri="{9D8B030D-6E8A-4147-A177-3AD203B41FA5}">
+                      <a16:colId xmlns:a16="http://schemas.microsoft.com/office/drawing/2014/main" val="20001"/>
+                    </a:ext>
+                  </a:extLst>
+                </a:gridCol>
+                <a:gridCol w="914400">
+                  <a:extLst>
+                    <a:ext uri="{9D8B030D-6E8A-4147-A177-3AD203B41FA5}">
+                      <a16:colId xmlns:a16="http://schemas.microsoft.com/office/drawing/2014/main" val="20002"/>
+                    </a:ext>
+                  </a:extLst>
+                </a:gridCol>
+                <a:gridCol w="7306056">
+                  <a:extLst>
+                    <a:ext uri="{9D8B030D-6E8A-4147-A177-3AD203B41FA5}">
+                      <a16:colId xmlns:a16="http://schemas.microsoft.com/office/drawing/2014/main" val="20003"/>
+                    </a:ext>
+                  </a:extLst>
+                </a:gridCol>
               </a:tblGrid>
               <a:tr h="402336">
                 <a:tc>
@@ -1738,7 +1540,7 @@
                     <a:bodyPr/>
                     <a:lstStyle/>
                     <a:p>
-                      <a:pPr indent="0" marL="0">
+                      <a:pPr marL="0" indent="0">
                         <a:buNone/>
                       </a:pPr>
                       <a:r>
@@ -1806,7 +1608,7 @@
                     <a:bodyPr/>
                     <a:lstStyle/>
                     <a:p>
-                      <a:pPr indent="0" marL="0">
+                      <a:pPr marL="0" indent="0">
                         <a:buNone/>
                       </a:pPr>
                       <a:r>
@@ -1874,7 +1676,7 @@
                     <a:bodyPr/>
                     <a:lstStyle/>
                     <a:p>
-                      <a:pPr indent="0" marL="0">
+                      <a:pPr marL="0" indent="0">
                         <a:buNone/>
                       </a:pPr>
                       <a:r>
@@ -1942,7 +1744,7 @@
                     <a:bodyPr/>
                     <a:lstStyle/>
                     <a:p>
-                      <a:pPr indent="0" marL="0">
+                      <a:pPr marL="0" indent="0">
                         <a:buNone/>
                       </a:pPr>
                       <a:r>
@@ -2005,6 +1807,11 @@
                     </a:solidFill>
                   </a:tcPr>
                 </a:tc>
+                <a:extLst>
+                  <a:ext uri="{0D108BD9-81ED-4DB2-BD59-A6C34878D82A}">
+                    <a16:rowId xmlns:a16="http://schemas.microsoft.com/office/drawing/2014/main" val="10000"/>
+                  </a:ext>
+                </a:extLst>
               </a:tr>
               <a:tr h="402336">
                 <a:tc>
@@ -2012,7 +1819,7 @@
                     <a:bodyPr/>
                     <a:lstStyle/>
                     <a:p>
-                      <a:pPr algn="ctr" indent="0" marL="0">
+                      <a:pPr marL="0" indent="0" algn="ctr">
                         <a:buNone/>
                       </a:pPr>
                       <a:r>
@@ -2080,7 +1887,7 @@
                     <a:bodyPr/>
                     <a:lstStyle/>
                     <a:p>
-                      <a:pPr indent="0" marL="0">
+                      <a:pPr marL="0" indent="0">
                         <a:buNone/>
                       </a:pPr>
                       <a:r>
@@ -2148,7 +1955,7 @@
                     <a:bodyPr/>
                     <a:lstStyle/>
                     <a:p>
-                      <a:pPr indent="0" marL="0">
+                      <a:pPr marL="0" indent="0">
                         <a:buNone/>
                       </a:pPr>
                       <a:r>
@@ -2216,7 +2023,7 @@
                     <a:bodyPr/>
                     <a:lstStyle/>
                     <a:p>
-                      <a:pPr indent="0" marL="0">
+                      <a:pPr marL="0" indent="0">
                         <a:buNone/>
                       </a:pPr>
                       <a:r>
@@ -2279,6 +2086,11 @@
                     </a:solidFill>
                   </a:tcPr>
                 </a:tc>
+                <a:extLst>
+                  <a:ext uri="{0D108BD9-81ED-4DB2-BD59-A6C34878D82A}">
+                    <a16:rowId xmlns:a16="http://schemas.microsoft.com/office/drawing/2014/main" val="10001"/>
+                  </a:ext>
+                </a:extLst>
               </a:tr>
               <a:tr h="402336">
                 <a:tc>
@@ -2286,7 +2098,7 @@
                     <a:bodyPr/>
                     <a:lstStyle/>
                     <a:p>
-                      <a:pPr algn="ctr" indent="0" marL="0">
+                      <a:pPr marL="0" indent="0" algn="ctr">
                         <a:buNone/>
                       </a:pPr>
                       <a:r>
@@ -2354,7 +2166,7 @@
                     <a:bodyPr/>
                     <a:lstStyle/>
                     <a:p>
-                      <a:pPr indent="0" marL="0">
+                      <a:pPr marL="0" indent="0">
                         <a:buNone/>
                       </a:pPr>
                       <a:r>
@@ -2422,7 +2234,7 @@
                     <a:bodyPr/>
                     <a:lstStyle/>
                     <a:p>
-                      <a:pPr indent="0" marL="0">
+                      <a:pPr marL="0" indent="0">
                         <a:buNone/>
                       </a:pPr>
                       <a:r>
@@ -2490,7 +2302,7 @@
                     <a:bodyPr/>
                     <a:lstStyle/>
                     <a:p>
-                      <a:pPr indent="0" marL="0">
+                      <a:pPr marL="0" indent="0">
                         <a:buNone/>
                       </a:pPr>
                       <a:r>
@@ -2553,6 +2365,11 @@
                     </a:solidFill>
                   </a:tcPr>
                 </a:tc>
+                <a:extLst>
+                  <a:ext uri="{0D108BD9-81ED-4DB2-BD59-A6C34878D82A}">
+                    <a16:rowId xmlns:a16="http://schemas.microsoft.com/office/drawing/2014/main" val="10002"/>
+                  </a:ext>
+                </a:extLst>
               </a:tr>
               <a:tr h="402336">
                 <a:tc>
@@ -2560,7 +2377,7 @@
                     <a:bodyPr/>
                     <a:lstStyle/>
                     <a:p>
-                      <a:pPr algn="ctr" indent="0" marL="0">
+                      <a:pPr marL="0" indent="0" algn="ctr">
                         <a:buNone/>
                       </a:pPr>
                       <a:r>
@@ -2628,7 +2445,7 @@
                     <a:bodyPr/>
                     <a:lstStyle/>
                     <a:p>
-                      <a:pPr indent="0" marL="0">
+                      <a:pPr marL="0" indent="0">
                         <a:buNone/>
                       </a:pPr>
                       <a:r>
@@ -2696,7 +2513,7 @@
                     <a:bodyPr/>
                     <a:lstStyle/>
                     <a:p>
-                      <a:pPr indent="0" marL="0">
+                      <a:pPr marL="0" indent="0">
                         <a:buNone/>
                       </a:pPr>
                       <a:r>
@@ -2764,7 +2581,7 @@
                     <a:bodyPr/>
                     <a:lstStyle/>
                     <a:p>
-                      <a:pPr indent="0" marL="0">
+                      <a:pPr marL="0" indent="0">
                         <a:buNone/>
                       </a:pPr>
                       <a:r>
@@ -2827,6 +2644,11 @@
                     </a:solidFill>
                   </a:tcPr>
                 </a:tc>
+                <a:extLst>
+                  <a:ext uri="{0D108BD9-81ED-4DB2-BD59-A6C34878D82A}">
+                    <a16:rowId xmlns:a16="http://schemas.microsoft.com/office/drawing/2014/main" val="10003"/>
+                  </a:ext>
+                </a:extLst>
               </a:tr>
               <a:tr h="402336">
                 <a:tc>
@@ -2834,7 +2656,7 @@
                     <a:bodyPr/>
                     <a:lstStyle/>
                     <a:p>
-                      <a:pPr algn="ctr" indent="0" marL="0">
+                      <a:pPr marL="0" indent="0" algn="ctr">
                         <a:buNone/>
                       </a:pPr>
                       <a:r>
@@ -2902,7 +2724,7 @@
                     <a:bodyPr/>
                     <a:lstStyle/>
                     <a:p>
-                      <a:pPr indent="0" marL="0">
+                      <a:pPr marL="0" indent="0">
                         <a:buNone/>
                       </a:pPr>
                       <a:r>
@@ -2970,7 +2792,7 @@
                     <a:bodyPr/>
                     <a:lstStyle/>
                     <a:p>
-                      <a:pPr indent="0" marL="0">
+                      <a:pPr marL="0" indent="0">
                         <a:buNone/>
                       </a:pPr>
                       <a:r>
@@ -3038,7 +2860,7 @@
                     <a:bodyPr/>
                     <a:lstStyle/>
                     <a:p>
-                      <a:pPr indent="0" marL="0">
+                      <a:pPr marL="0" indent="0">
                         <a:buNone/>
                       </a:pPr>
                       <a:r>
@@ -3101,6 +2923,11 @@
                     </a:solidFill>
                   </a:tcPr>
                 </a:tc>
+                <a:extLst>
+                  <a:ext uri="{0D108BD9-81ED-4DB2-BD59-A6C34878D82A}">
+                    <a16:rowId xmlns:a16="http://schemas.microsoft.com/office/drawing/2014/main" val="10004"/>
+                  </a:ext>
+                </a:extLst>
               </a:tr>
               <a:tr h="402336">
                 <a:tc>
@@ -3108,7 +2935,7 @@
                     <a:bodyPr/>
                     <a:lstStyle/>
                     <a:p>
-                      <a:pPr algn="ctr" indent="0" marL="0">
+                      <a:pPr marL="0" indent="0" algn="ctr">
                         <a:buNone/>
                       </a:pPr>
                       <a:r>
@@ -3176,7 +3003,7 @@
                     <a:bodyPr/>
                     <a:lstStyle/>
                     <a:p>
-                      <a:pPr indent="0" marL="0">
+                      <a:pPr marL="0" indent="0">
                         <a:buNone/>
                       </a:pPr>
                       <a:r>
@@ -3244,7 +3071,7 @@
                     <a:bodyPr/>
                     <a:lstStyle/>
                     <a:p>
-                      <a:pPr indent="0" marL="0">
+                      <a:pPr marL="0" indent="0">
                         <a:buNone/>
                       </a:pPr>
                       <a:r>
@@ -3312,7 +3139,7 @@
                     <a:bodyPr/>
                     <a:lstStyle/>
                     <a:p>
-                      <a:pPr indent="0" marL="0">
+                      <a:pPr marL="0" indent="0">
                         <a:buNone/>
                       </a:pPr>
                       <a:r>
@@ -3375,6 +3202,11 @@
                     </a:solidFill>
                   </a:tcPr>
                 </a:tc>
+                <a:extLst>
+                  <a:ext uri="{0D108BD9-81ED-4DB2-BD59-A6C34878D82A}">
+                    <a16:rowId xmlns:a16="http://schemas.microsoft.com/office/drawing/2014/main" val="10005"/>
+                  </a:ext>
+                </a:extLst>
               </a:tr>
               <a:tr h="402336">
                 <a:tc>
@@ -3382,7 +3214,7 @@
                     <a:bodyPr/>
                     <a:lstStyle/>
                     <a:p>
-                      <a:pPr algn="ctr" indent="0" marL="0">
+                      <a:pPr marL="0" indent="0" algn="ctr">
                         <a:buNone/>
                       </a:pPr>
                       <a:r>
@@ -3450,7 +3282,7 @@
                     <a:bodyPr/>
                     <a:lstStyle/>
                     <a:p>
-                      <a:pPr indent="0" marL="0">
+                      <a:pPr marL="0" indent="0">
                         <a:buNone/>
                       </a:pPr>
                       <a:r>
@@ -3518,7 +3350,7 @@
                     <a:bodyPr/>
                     <a:lstStyle/>
                     <a:p>
-                      <a:pPr indent="0" marL="0">
+                      <a:pPr marL="0" indent="0">
                         <a:buNone/>
                       </a:pPr>
                       <a:r>
@@ -3586,7 +3418,7 @@
                     <a:bodyPr/>
                     <a:lstStyle/>
                     <a:p>
-                      <a:pPr indent="0" marL="0">
+                      <a:pPr marL="0" indent="0">
                         <a:buNone/>
                       </a:pPr>
                       <a:r>
@@ -3649,6 +3481,11 @@
                     </a:solidFill>
                   </a:tcPr>
                 </a:tc>
+                <a:extLst>
+                  <a:ext uri="{0D108BD9-81ED-4DB2-BD59-A6C34878D82A}">
+                    <a16:rowId xmlns:a16="http://schemas.microsoft.com/office/drawing/2014/main" val="10006"/>
+                  </a:ext>
+                </a:extLst>
               </a:tr>
               <a:tr h="402336">
                 <a:tc>
@@ -3656,7 +3493,7 @@
                     <a:bodyPr/>
                     <a:lstStyle/>
                     <a:p>
-                      <a:pPr algn="ctr" indent="0" marL="0">
+                      <a:pPr marL="0" indent="0" algn="ctr">
                         <a:buNone/>
                       </a:pPr>
                       <a:r>
@@ -3724,7 +3561,7 @@
                     <a:bodyPr/>
                     <a:lstStyle/>
                     <a:p>
-                      <a:pPr indent="0" marL="0">
+                      <a:pPr marL="0" indent="0">
                         <a:buNone/>
                       </a:pPr>
                       <a:r>
@@ -3792,7 +3629,7 @@
                     <a:bodyPr/>
                     <a:lstStyle/>
                     <a:p>
-                      <a:pPr indent="0" marL="0">
+                      <a:pPr marL="0" indent="0">
                         <a:buNone/>
                       </a:pPr>
                       <a:r>
@@ -3860,7 +3697,7 @@
                     <a:bodyPr/>
                     <a:lstStyle/>
                     <a:p>
-                      <a:pPr indent="0" marL="0">
+                      <a:pPr marL="0" indent="0">
                         <a:buNone/>
                       </a:pPr>
                       <a:r>
@@ -3923,6 +3760,11 @@
                     </a:solidFill>
                   </a:tcPr>
                 </a:tc>
+                <a:extLst>
+                  <a:ext uri="{0D108BD9-81ED-4DB2-BD59-A6C34878D82A}">
+                    <a16:rowId xmlns:a16="http://schemas.microsoft.com/office/drawing/2014/main" val="10007"/>
+                  </a:ext>
+                </a:extLst>
               </a:tr>
               <a:tr h="402336">
                 <a:tc>
@@ -3930,7 +3772,7 @@
                     <a:bodyPr/>
                     <a:lstStyle/>
                     <a:p>
-                      <a:pPr algn="ctr" indent="0" marL="0">
+                      <a:pPr marL="0" indent="0" algn="ctr">
                         <a:buNone/>
                       </a:pPr>
                       <a:r>
@@ -3998,7 +3840,7 @@
                     <a:bodyPr/>
                     <a:lstStyle/>
                     <a:p>
-                      <a:pPr indent="0" marL="0">
+                      <a:pPr marL="0" indent="0">
                         <a:buNone/>
                       </a:pPr>
                       <a:r>
@@ -4066,7 +3908,7 @@
                     <a:bodyPr/>
                     <a:lstStyle/>
                     <a:p>
-                      <a:pPr indent="0" marL="0">
+                      <a:pPr marL="0" indent="0">
                         <a:buNone/>
                       </a:pPr>
                       <a:r>
@@ -4134,7 +3976,7 @@
                     <a:bodyPr/>
                     <a:lstStyle/>
                     <a:p>
-                      <a:pPr indent="0" marL="0">
+                      <a:pPr marL="0" indent="0">
                         <a:buNone/>
                       </a:pPr>
                       <a:r>
@@ -4197,6 +4039,11 @@
                     </a:solidFill>
                   </a:tcPr>
                 </a:tc>
+                <a:extLst>
+                  <a:ext uri="{0D108BD9-81ED-4DB2-BD59-A6C34878D82A}">
+                    <a16:rowId xmlns:a16="http://schemas.microsoft.com/office/drawing/2014/main" val="10008"/>
+                  </a:ext>
+                </a:extLst>
               </a:tr>
             </a:tbl>
           </a:graphicData>
@@ -4228,13 +4075,20 @@
             <a:prstDash val="solid"/>
           </a:ln>
           <a:effectLst>
-            <a:outerShdw sx="100000" sy="100000" kx="0" ky="0" algn="bl" rotWithShape="0" blurRad="101600" dist="25400" dir="5400000">
+            <a:outerShdw blurRad="101600" dist="25400" dir="5400000" algn="bl" rotWithShape="0">
               <a:srgbClr val="9AA7B4">
                 <a:alpha val="28000"/>
               </a:srgbClr>
             </a:outerShdw>
           </a:effectLst>
         </p:spPr>
+        <p:txBody>
+          <a:bodyPr/>
+          <a:lstStyle/>
+          <a:p>
+            <a:endParaRPr lang="en-US"/>
+          </a:p>
+        </p:txBody>
       </p:sp>
       <p:sp>
         <p:nvSpPr>
@@ -4257,7 +4111,7 @@
           <a:bodyPr wrap="square" lIns="0" tIns="0" rIns="0" bIns="0" rtlCol="0" anchor="ctr"/>
           <a:lstStyle/>
           <a:p>
-            <a:pPr indent="0" marL="0">
+            <a:pPr marL="0" indent="0">
               <a:buNone/>
             </a:pPr>
             <a:r>
@@ -4296,7 +4150,7 @@
           <a:bodyPr wrap="square" lIns="0" tIns="0" rIns="0" bIns="0" rtlCol="0" anchor="ctr"/>
           <a:lstStyle/>
           <a:p>
-            <a:pPr indent="0" marL="0">
+            <a:pPr marL="0" indent="0">
               <a:lnSpc>
                 <a:spcPts val="1600"/>
               </a:lnSpc>
@@ -4333,6 +4187,7 @@
         <a:solidFill>
           <a:srgbClr val="16283C"/>
         </a:solidFill>
+        <a:effectLst/>
       </p:bgPr>
     </p:bg>
     <p:spTree>
@@ -4373,6 +4228,13 @@
             <a:prstDash val="solid"/>
           </a:ln>
         </p:spPr>
+        <p:txBody>
+          <a:bodyPr/>
+          <a:lstStyle/>
+          <a:p>
+            <a:endParaRPr lang="en-US"/>
+          </a:p>
+        </p:txBody>
       </p:sp>
       <p:sp>
         <p:nvSpPr>
@@ -4395,11 +4257,11 @@
           <a:bodyPr wrap="square" lIns="0" tIns="0" rIns="0" bIns="0" rtlCol="0" anchor="ctr"/>
           <a:lstStyle/>
           <a:p>
-            <a:pPr indent="0" marL="0">
+            <a:pPr marL="0" indent="0">
               <a:buNone/>
             </a:pPr>
             <a:r>
-              <a:rPr lang="en-US" sz="1200" b="1" spc="250" kern="0" dirty="0">
+              <a:rPr lang="en-US" sz="1200" b="1" kern="0" spc="250" dirty="0">
                 <a:solidFill>
                   <a:srgbClr val="E8A33D"/>
                 </a:solidFill>
@@ -4434,7 +4296,7 @@
           <a:bodyPr wrap="square" lIns="0" tIns="0" rIns="0" bIns="0" rtlCol="0" anchor="ctr"/>
           <a:lstStyle/>
           <a:p>
-            <a:pPr indent="0" marL="0">
+            <a:pPr marL="0" indent="0">
               <a:buNone/>
             </a:pPr>
             <a:r>
@@ -4473,7 +4335,7 @@
           <a:bodyPr wrap="square" lIns="0" tIns="0" rIns="0" bIns="0" rtlCol="0" anchor="ctr"/>
           <a:lstStyle/>
           <a:p>
-            <a:pPr indent="0" marL="0">
+            <a:pPr marL="0" indent="0">
               <a:buNone/>
             </a:pPr>
             <a:r>
@@ -4493,268 +4355,6 @@
       </p:sp>
       <p:sp>
         <p:nvSpPr>
-          <p:cNvPr id="6" name="Text 4"/>
-          <p:cNvSpPr/>
-          <p:nvPr/>
-        </p:nvSpPr>
-        <p:spPr>
-          <a:xfrm>
-            <a:off x="822960" y="3383280"/>
-            <a:ext cx="4572000" cy="274320"/>
-          </a:xfrm>
-          <a:prstGeom prst="rect">
-            <a:avLst/>
-          </a:prstGeom>
-          <a:noFill/>
-          <a:ln/>
-        </p:spPr>
-        <p:txBody>
-          <a:bodyPr wrap="square" lIns="0" tIns="0" rIns="0" bIns="0" rtlCol="0" anchor="ctr"/>
-          <a:lstStyle/>
-          <a:p>
-            <a:pPr indent="0" marL="0">
-              <a:buNone/>
-            </a:pPr>
-            <a:r>
-              <a:rPr lang="en-US" sz="1100" b="1" spc="200" kern="0" dirty="0">
-                <a:solidFill>
-                  <a:srgbClr val="E8A33D"/>
-                </a:solidFill>
-                <a:latin typeface="Calibri" pitchFamily="34" charset="0"/>
-                <a:ea typeface="Calibri" pitchFamily="34" charset="-122"/>
-                <a:cs typeface="Calibri" pitchFamily="34" charset="-120"/>
-              </a:rPr>
-              <a:t>TODAY'S OBJECTIVE</a:t>
-            </a:r>
-            <a:endParaRPr lang="en-US" sz="1100" dirty="0"/>
-          </a:p>
-        </p:txBody>
-      </p:sp>
-      <p:sp>
-        <p:nvSpPr>
-          <p:cNvPr id="7" name="Text 5"/>
-          <p:cNvSpPr/>
-          <p:nvPr/>
-        </p:nvSpPr>
-        <p:spPr>
-          <a:xfrm>
-            <a:off x="822960" y="3703320"/>
-            <a:ext cx="5486400" cy="640080"/>
-          </a:xfrm>
-          <a:prstGeom prst="rect">
-            <a:avLst/>
-          </a:prstGeom>
-          <a:noFill/>
-          <a:ln/>
-        </p:spPr>
-        <p:txBody>
-          <a:bodyPr wrap="square" lIns="0" tIns="0" rIns="0" bIns="0" rtlCol="0" anchor="ctr"/>
-          <a:lstStyle/>
-          <a:p>
-            <a:pPr indent="0" marL="0">
-              <a:lnSpc>
-                <a:spcPts val="2000"/>
-              </a:lnSpc>
-              <a:buNone/>
-            </a:pPr>
-            <a:r>
-              <a:rPr lang="en-US" sz="1400" dirty="0">
-                <a:solidFill>
-                  <a:srgbClr val="D7E2EC"/>
-                </a:solidFill>
-                <a:latin typeface="Calibri" pitchFamily="34" charset="0"/>
-                <a:ea typeface="Calibri" pitchFamily="34" charset="-122"/>
-                <a:cs typeface="Calibri" pitchFamily="34" charset="-120"/>
-              </a:rPr>
-              <a:t>[One objective — a verb the group can actually do in 25 minutes]</a:t>
-            </a:r>
-            <a:endParaRPr lang="en-US" sz="1400" dirty="0"/>
-          </a:p>
-        </p:txBody>
-      </p:sp>
-      <p:sp>
-        <p:nvSpPr>
-          <p:cNvPr id="8" name="Text 6"/>
-          <p:cNvSpPr/>
-          <p:nvPr/>
-        </p:nvSpPr>
-        <p:spPr>
-          <a:xfrm>
-            <a:off x="6949440" y="3383280"/>
-            <a:ext cx="4572000" cy="274320"/>
-          </a:xfrm>
-          <a:prstGeom prst="rect">
-            <a:avLst/>
-          </a:prstGeom>
-          <a:noFill/>
-          <a:ln/>
-        </p:spPr>
-        <p:txBody>
-          <a:bodyPr wrap="square" lIns="0" tIns="0" rIns="0" bIns="0" rtlCol="0" anchor="ctr"/>
-          <a:lstStyle/>
-          <a:p>
-            <a:pPr indent="0" marL="0">
-              <a:buNone/>
-            </a:pPr>
-            <a:r>
-              <a:rPr lang="en-US" sz="1100" b="1" spc="200" kern="0" dirty="0">
-                <a:solidFill>
-                  <a:srgbClr val="E8A33D"/>
-                </a:solidFill>
-                <a:latin typeface="Calibri" pitchFamily="34" charset="0"/>
-                <a:ea typeface="Calibri" pitchFamily="34" charset="-122"/>
-                <a:cs typeface="Calibri" pitchFamily="34" charset="-120"/>
-              </a:rPr>
-              <a:t>ROLES</a:t>
-            </a:r>
-            <a:endParaRPr lang="en-US" sz="1100" dirty="0"/>
-          </a:p>
-        </p:txBody>
-      </p:sp>
-      <p:sp>
-        <p:nvSpPr>
-          <p:cNvPr id="9" name="Text 7"/>
-          <p:cNvSpPr/>
-          <p:nvPr/>
-        </p:nvSpPr>
-        <p:spPr>
-          <a:xfrm>
-            <a:off x="6949440" y="3703320"/>
-            <a:ext cx="3931920" cy="1600200"/>
-          </a:xfrm>
-          <a:prstGeom prst="rect">
-            <a:avLst/>
-          </a:prstGeom>
-          <a:noFill/>
-          <a:ln/>
-        </p:spPr>
-        <p:txBody>
-          <a:bodyPr wrap="square" lIns="0" tIns="0" rIns="0" bIns="0" rtlCol="0" anchor="ctr"/>
-          <a:lstStyle/>
-          <a:p>
-            <a:pPr indent="0" marL="0">
-              <a:lnSpc>
-                <a:spcPts val="1700"/>
-              </a:lnSpc>
-              <a:buNone/>
-            </a:pPr>
-            <a:r>
-              <a:rPr lang="en-US" sz="1250" dirty="0">
-                <a:solidFill>
-                  <a:srgbClr val="D7E2EC"/>
-                </a:solidFill>
-                <a:latin typeface="Calibri" pitchFamily="34" charset="0"/>
-                <a:ea typeface="Calibri" pitchFamily="34" charset="-122"/>
-                <a:cs typeface="Calibri" pitchFamily="34" charset="-120"/>
-              </a:rPr>
-              <a:t>Presenter: [name]</a:t>
-            </a:r>
-            <a:endParaRPr lang="en-US" sz="1250" dirty="0"/>
-          </a:p>
-          <a:p>
-            <a:pPr indent="0" marL="0">
-              <a:lnSpc>
-                <a:spcPts val="1700"/>
-              </a:lnSpc>
-              <a:buNone/>
-            </a:pPr>
-            <a:r>
-              <a:rPr lang="en-US" sz="1250" dirty="0">
-                <a:solidFill>
-                  <a:srgbClr val="D7E2EC"/>
-                </a:solidFill>
-                <a:latin typeface="Calibri" pitchFamily="34" charset="0"/>
-                <a:ea typeface="Calibri" pitchFamily="34" charset="-122"/>
-                <a:cs typeface="Calibri" pitchFamily="34" charset="-120"/>
-              </a:rPr>
-              <a:t>Whiteboard scribe: [name]</a:t>
-            </a:r>
-            <a:endParaRPr lang="en-US" sz="1250" dirty="0"/>
-          </a:p>
-          <a:p>
-            <a:pPr indent="0" marL="0">
-              <a:lnSpc>
-                <a:spcPts val="1700"/>
-              </a:lnSpc>
-              <a:buNone/>
-            </a:pPr>
-            <a:r>
-              <a:rPr lang="en-US" sz="1250" dirty="0">
-                <a:solidFill>
-                  <a:srgbClr val="D7E2EC"/>
-                </a:solidFill>
-                <a:latin typeface="Calibri" pitchFamily="34" charset="0"/>
-                <a:ea typeface="Calibri" pitchFamily="34" charset="-122"/>
-                <a:cs typeface="Calibri" pitchFamily="34" charset="-120"/>
-              </a:rPr>
-              <a:t>PGY-1 discussant: [name]</a:t>
-            </a:r>
-            <a:endParaRPr lang="en-US" sz="1250" dirty="0"/>
-          </a:p>
-          <a:p>
-            <a:pPr indent="0" marL="0">
-              <a:lnSpc>
-                <a:spcPts val="1700"/>
-              </a:lnSpc>
-              <a:buNone/>
-            </a:pPr>
-            <a:r>
-              <a:rPr lang="en-US" sz="1250" dirty="0">
-                <a:solidFill>
-                  <a:srgbClr val="D7E2EC"/>
-                </a:solidFill>
-                <a:latin typeface="Calibri" pitchFamily="34" charset="0"/>
-                <a:ea typeface="Calibri" pitchFamily="34" charset="-122"/>
-                <a:cs typeface="Calibri" pitchFamily="34" charset="-120"/>
-              </a:rPr>
-              <a:t>Senior discussant: [name]</a:t>
-            </a:r>
-            <a:endParaRPr lang="en-US" sz="1250" dirty="0"/>
-          </a:p>
-          <a:p>
-            <a:pPr indent="0" marL="0">
-              <a:lnSpc>
-                <a:spcPts val="1700"/>
-              </a:lnSpc>
-              <a:buNone/>
-            </a:pPr>
-            <a:r>
-              <a:rPr lang="en-US" sz="1250" dirty="0">
-                <a:solidFill>
-                  <a:srgbClr val="D7E2EC"/>
-                </a:solidFill>
-                <a:latin typeface="Calibri" pitchFamily="34" charset="0"/>
-                <a:ea typeface="Calibri" pitchFamily="34" charset="-122"/>
-                <a:cs typeface="Calibri" pitchFamily="34" charset="-120"/>
-              </a:rPr>
-              <a:t>Faculty: [name]</a:t>
-            </a:r>
-            <a:endParaRPr lang="en-US" sz="1250" dirty="0"/>
-          </a:p>
-          <a:p>
-            <a:pPr indent="0" marL="0">
-              <a:lnSpc>
-                <a:spcPts val="1700"/>
-              </a:lnSpc>
-              <a:buNone/>
-            </a:pPr>
-            <a:r>
-              <a:rPr lang="en-US" sz="1250" dirty="0">
-                <a:solidFill>
-                  <a:srgbClr val="D7E2EC"/>
-                </a:solidFill>
-                <a:latin typeface="Calibri" pitchFamily="34" charset="0"/>
-                <a:ea typeface="Calibri" pitchFamily="34" charset="-122"/>
-                <a:cs typeface="Calibri" pitchFamily="34" charset="-120"/>
-              </a:rPr>
-              <a:t>Facilitator: [name]</a:t>
-            </a:r>
-            <a:endParaRPr lang="en-US" sz="1250" dirty="0"/>
-          </a:p>
-        </p:txBody>
-      </p:sp>
-      <p:sp>
-        <p:nvSpPr>
           <p:cNvPr id="10" name="Shape 8"/>
           <p:cNvSpPr/>
           <p:nvPr/>
@@ -4779,6 +4379,13 @@
             <a:prstDash val="solid"/>
           </a:ln>
         </p:spPr>
+        <p:txBody>
+          <a:bodyPr/>
+          <a:lstStyle/>
+          <a:p>
+            <a:endParaRPr lang="en-US"/>
+          </a:p>
+        </p:txBody>
       </p:sp>
       <p:sp>
         <p:nvSpPr>
@@ -4801,7 +4408,7 @@
           <a:bodyPr wrap="square" lIns="0" tIns="0" rIns="0" bIns="0" rtlCol="0" anchor="ctr"/>
           <a:lstStyle/>
           <a:p>
-            <a:pPr indent="0" marL="0">
+            <a:pPr marL="0" indent="0">
               <a:buNone/>
             </a:pPr>
             <a:r>
@@ -4835,6 +4442,7 @@
         <a:solidFill>
           <a:srgbClr val="FFFFFF"/>
         </a:solidFill>
+        <a:effectLst/>
       </p:bgPr>
     </p:bg>
     <p:spTree>
@@ -4872,11 +4480,11 @@
           <a:bodyPr wrap="square" lIns="0" tIns="0" rIns="0" bIns="0" rtlCol="0" anchor="ctr"/>
           <a:lstStyle/>
           <a:p>
-            <a:pPr indent="0" marL="0">
+            <a:pPr marL="0" indent="0">
               <a:buNone/>
             </a:pPr>
             <a:r>
-              <a:rPr lang="en-US" sz="1100" b="1" spc="200" kern="0" dirty="0">
+              <a:rPr lang="en-US" sz="1100" b="1" kern="0" spc="200" dirty="0">
                 <a:solidFill>
                   <a:srgbClr val="E8A33D"/>
                 </a:solidFill>
@@ -4916,6 +4524,13 @@
             <a:prstDash val="solid"/>
           </a:ln>
         </p:spPr>
+        <p:txBody>
+          <a:bodyPr/>
+          <a:lstStyle/>
+          <a:p>
+            <a:endParaRPr lang="en-US"/>
+          </a:p>
+        </p:txBody>
       </p:sp>
       <p:sp>
         <p:nvSpPr>
@@ -4938,7 +4553,7 @@
           <a:bodyPr wrap="square" lIns="0" tIns="0" rIns="0" bIns="0" rtlCol="0" anchor="ctr"/>
           <a:lstStyle/>
           <a:p>
-            <a:pPr algn="ctr" indent="0" marL="0">
+            <a:pPr marL="0" indent="0" algn="ctr">
               <a:buNone/>
             </a:pPr>
             <a:r>
@@ -4977,7 +4592,7 @@
           <a:bodyPr wrap="square" lIns="0" tIns="0" rIns="0" bIns="0" rtlCol="0" anchor="ctr"/>
           <a:lstStyle/>
           <a:p>
-            <a:pPr indent="0" marL="0">
+            <a:pPr marL="0" indent="0">
               <a:lnSpc>
                 <a:spcPts val="4400"/>
               </a:lnSpc>
@@ -4997,7 +4612,7 @@
             <a:endParaRPr lang="en-US" sz="3200" dirty="0"/>
           </a:p>
           <a:p>
-            <a:pPr indent="0" marL="0">
+            <a:pPr marL="0" indent="0">
               <a:lnSpc>
                 <a:spcPts val="4400"/>
               </a:lnSpc>
@@ -5044,13 +4659,20 @@
             <a:prstDash val="solid"/>
           </a:ln>
           <a:effectLst>
-            <a:outerShdw sx="100000" sy="100000" kx="0" ky="0" algn="bl" rotWithShape="0" blurRad="101600" dist="25400" dir="5400000">
+            <a:outerShdw blurRad="101600" dist="25400" dir="5400000" algn="bl" rotWithShape="0">
               <a:srgbClr val="9AA7B4">
                 <a:alpha val="28000"/>
               </a:srgbClr>
             </a:outerShdw>
           </a:effectLst>
         </p:spPr>
+        <p:txBody>
+          <a:bodyPr/>
+          <a:lstStyle/>
+          <a:p>
+            <a:endParaRPr lang="en-US"/>
+          </a:p>
+        </p:txBody>
       </p:sp>
       <p:sp>
         <p:nvSpPr>
@@ -5073,7 +4695,7 @@
           <a:bodyPr wrap="square" lIns="0" tIns="0" rIns="0" bIns="0" rtlCol="0" anchor="ctr"/>
           <a:lstStyle/>
           <a:p>
-            <a:pPr indent="0" marL="0">
+            <a:pPr marL="0" indent="0">
               <a:lnSpc>
                 <a:spcPts val="2600"/>
               </a:lnSpc>
@@ -5094,87 +4716,6 @@
           </a:p>
         </p:txBody>
       </p:sp>
-      <p:sp>
-        <p:nvSpPr>
-          <p:cNvPr id="8" name="Text 6"/>
-          <p:cNvSpPr/>
-          <p:nvPr/>
-        </p:nvSpPr>
-        <p:spPr>
-          <a:xfrm>
-            <a:off x="822960" y="4617720"/>
-            <a:ext cx="5486400" cy="411480"/>
-          </a:xfrm>
-          <a:prstGeom prst="rect">
-            <a:avLst/>
-          </a:prstGeom>
-          <a:noFill/>
-          <a:ln/>
-        </p:spPr>
-        <p:txBody>
-          <a:bodyPr wrap="square" lIns="0" tIns="0" rIns="0" bIns="0" rtlCol="0" anchor="ctr"/>
-          <a:lstStyle/>
-          <a:p>
-            <a:pPr indent="0" marL="0">
-              <a:buNone/>
-            </a:pPr>
-            <a:r>
-              <a:rPr lang="en-US" sz="1600" b="1" dirty="0">
-                <a:solidFill>
-                  <a:srgbClr val="B23A48"/>
-                </a:solidFill>
-                <a:latin typeface="Calibri" pitchFamily="34" charset="0"/>
-                <a:ea typeface="Calibri" pitchFamily="34" charset="-122"/>
-                <a:cs typeface="Calibri" pitchFamily="34" charset="-120"/>
-              </a:rPr>
-              <a:t>Then stop talking.</a:t>
-            </a:r>
-            <a:endParaRPr lang="en-US" sz="1600" dirty="0"/>
-          </a:p>
-        </p:txBody>
-      </p:sp>
-      <p:sp>
-        <p:nvSpPr>
-          <p:cNvPr id="9" name="Text 7"/>
-          <p:cNvSpPr/>
-          <p:nvPr/>
-        </p:nvSpPr>
-        <p:spPr>
-          <a:xfrm>
-            <a:off x="822960" y="5029200"/>
-            <a:ext cx="10515600" cy="731520"/>
-          </a:xfrm>
-          <a:prstGeom prst="rect">
-            <a:avLst/>
-          </a:prstGeom>
-          <a:noFill/>
-          <a:ln/>
-        </p:spPr>
-        <p:txBody>
-          <a:bodyPr wrap="square" lIns="0" tIns="0" rIns="0" bIns="0" rtlCol="0" anchor="ctr"/>
-          <a:lstStyle/>
-          <a:p>
-            <a:pPr indent="0" marL="0">
-              <a:lnSpc>
-                <a:spcPts val="1700"/>
-              </a:lnSpc>
-              <a:buNone/>
-            </a:pPr>
-            <a:r>
-              <a:rPr lang="en-US" sz="1250" dirty="0">
-                <a:solidFill>
-                  <a:srgbClr val="5F6B78"/>
-                </a:solidFill>
-                <a:latin typeface="Calibri" pitchFamily="34" charset="0"/>
-                <a:ea typeface="Calibri" pitchFamily="34" charset="-122"/>
-                <a:cs typeface="Calibri" pitchFamily="34" charset="-120"/>
-              </a:rPr>
-              <a:t>Do not continue into past history, medications, or family history. The demographics march is the fastest way to lose the room. Take questions if the group has them; volunteer nothing.</a:t>
-            </a:r>
-            <a:endParaRPr lang="en-US" sz="1250" dirty="0"/>
-          </a:p>
-        </p:txBody>
-      </p:sp>
     </p:spTree>
   </p:cSld>
   <p:clrMapOvr>
@@ -5191,6 +4732,7 @@
         <a:solidFill>
           <a:srgbClr val="FFFFFF"/>
         </a:solidFill>
+        <a:effectLst/>
       </p:bgPr>
     </p:bg>
     <p:spTree>
@@ -5228,11 +4770,11 @@
           <a:bodyPr wrap="square" lIns="0" tIns="0" rIns="0" bIns="0" rtlCol="0" anchor="ctr"/>
           <a:lstStyle/>
           <a:p>
-            <a:pPr indent="0" marL="0">
+            <a:pPr marL="0" indent="0">
               <a:buNone/>
             </a:pPr>
             <a:r>
-              <a:rPr lang="en-US" sz="1100" b="1" spc="200" kern="0" dirty="0">
+              <a:rPr lang="en-US" sz="1100" b="1" kern="0" spc="200" dirty="0">
                 <a:solidFill>
                   <a:srgbClr val="E8A33D"/>
                 </a:solidFill>
@@ -5272,6 +4814,13 @@
             <a:prstDash val="solid"/>
           </a:ln>
         </p:spPr>
+        <p:txBody>
+          <a:bodyPr/>
+          <a:lstStyle/>
+          <a:p>
+            <a:endParaRPr lang="en-US"/>
+          </a:p>
+        </p:txBody>
       </p:sp>
       <p:sp>
         <p:nvSpPr>
@@ -5294,7 +4843,7 @@
           <a:bodyPr wrap="square" lIns="0" tIns="0" rIns="0" bIns="0" rtlCol="0" anchor="ctr"/>
           <a:lstStyle/>
           <a:p>
-            <a:pPr algn="ctr" indent="0" marL="0">
+            <a:pPr marL="0" indent="0" algn="ctr">
               <a:buNone/>
             </a:pPr>
             <a:r>
@@ -5333,7 +4882,7 @@
           <a:bodyPr wrap="square" lIns="0" tIns="0" rIns="0" bIns="0" rtlCol="0" anchor="ctr"/>
           <a:lstStyle/>
           <a:p>
-            <a:pPr indent="0" marL="0">
+            <a:pPr marL="0" indent="0">
               <a:buNone/>
             </a:pPr>
             <a:r>
@@ -5377,13 +4926,20 @@
             <a:prstDash val="solid"/>
           </a:ln>
           <a:effectLst>
-            <a:outerShdw sx="100000" sy="100000" kx="0" ky="0" algn="bl" rotWithShape="0" blurRad="101600" dist="25400" dir="5400000">
+            <a:outerShdw blurRad="101600" dist="25400" dir="5400000" algn="bl" rotWithShape="0">
               <a:srgbClr val="9AA7B4">
                 <a:alpha val="28000"/>
               </a:srgbClr>
             </a:outerShdw>
           </a:effectLst>
         </p:spPr>
+        <p:txBody>
+          <a:bodyPr/>
+          <a:lstStyle/>
+          <a:p>
+            <a:endParaRPr lang="en-US"/>
+          </a:p>
+        </p:txBody>
       </p:sp>
       <p:sp>
         <p:nvSpPr>
@@ -5409,6 +4965,13 @@
             <a:prstDash val="solid"/>
           </a:ln>
         </p:spPr>
+        <p:txBody>
+          <a:bodyPr/>
+          <a:lstStyle/>
+          <a:p>
+            <a:endParaRPr lang="en-US"/>
+          </a:p>
+        </p:txBody>
       </p:sp>
       <p:sp>
         <p:nvSpPr>
@@ -5431,11 +4994,11 @@
           <a:bodyPr wrap="square" lIns="0" tIns="0" rIns="0" bIns="0" rtlCol="0" anchor="ctr"/>
           <a:lstStyle/>
           <a:p>
-            <a:pPr indent="0" marL="0">
+            <a:pPr marL="0" indent="0">
               <a:buNone/>
             </a:pPr>
             <a:r>
-              <a:rPr lang="en-US" sz="1150" b="1" spc="150" kern="0" dirty="0">
+              <a:rPr lang="en-US" sz="1150" b="1" kern="0" spc="150" dirty="0">
                 <a:solidFill>
                   <a:srgbClr val="FFFFFF"/>
                 </a:solidFill>
@@ -5470,7 +5033,7 @@
           <a:bodyPr wrap="square" lIns="0" tIns="0" rIns="0" bIns="0" rtlCol="0" anchor="ctr"/>
           <a:lstStyle/>
           <a:p>
-            <a:pPr indent="0" marL="0">
+            <a:pPr marL="0" indent="0">
               <a:buNone/>
             </a:pPr>
             <a:r>
@@ -5509,7 +5072,7 @@
           <a:bodyPr wrap="square" lIns="0" tIns="0" rIns="0" bIns="0" rtlCol="0" anchor="ctr"/>
           <a:lstStyle/>
           <a:p>
-            <a:pPr indent="0" marL="0">
+            <a:pPr marL="0" indent="0">
               <a:lnSpc>
                 <a:spcPts val="1500"/>
               </a:lnSpc>
@@ -5551,7 +5114,7 @@
           <a:bodyPr wrap="square" lIns="0" tIns="0" rIns="0" bIns="0" rtlCol="0" anchor="ctr"/>
           <a:lstStyle/>
           <a:p>
-            <a:pPr indent="0" marL="0">
+            <a:pPr marL="0" indent="0">
               <a:buNone/>
             </a:pPr>
             <a:r>
@@ -5590,7 +5153,7 @@
           <a:bodyPr wrap="square" lIns="0" tIns="0" rIns="0" bIns="0" rtlCol="0" anchor="ctr"/>
           <a:lstStyle/>
           <a:p>
-            <a:pPr indent="0" marL="0">
+            <a:pPr marL="0" indent="0">
               <a:lnSpc>
                 <a:spcPts val="1500"/>
               </a:lnSpc>
@@ -5632,7 +5195,7 @@
           <a:bodyPr wrap="square" lIns="0" tIns="0" rIns="0" bIns="0" rtlCol="0" anchor="ctr"/>
           <a:lstStyle/>
           <a:p>
-            <a:pPr indent="0" marL="0">
+            <a:pPr marL="0" indent="0">
               <a:buNone/>
             </a:pPr>
             <a:r>
@@ -5671,7 +5234,7 @@
           <a:bodyPr wrap="square" lIns="0" tIns="0" rIns="0" bIns="0" rtlCol="0" anchor="ctr"/>
           <a:lstStyle/>
           <a:p>
-            <a:pPr indent="0" marL="0">
+            <a:pPr marL="0" indent="0">
               <a:lnSpc>
                 <a:spcPts val="1500"/>
               </a:lnSpc>
@@ -5713,7 +5276,7 @@
           <a:bodyPr wrap="square" lIns="0" tIns="0" rIns="0" bIns="0" rtlCol="0" anchor="ctr"/>
           <a:lstStyle/>
           <a:p>
-            <a:pPr indent="0" marL="0">
+            <a:pPr marL="0" indent="0">
               <a:buNone/>
             </a:pPr>
             <a:r>
@@ -5752,7 +5315,7 @@
           <a:bodyPr wrap="square" lIns="0" tIns="0" rIns="0" bIns="0" rtlCol="0" anchor="ctr"/>
           <a:lstStyle/>
           <a:p>
-            <a:pPr indent="0" marL="0">
+            <a:pPr marL="0" indent="0">
               <a:lnSpc>
                 <a:spcPts val="1500"/>
               </a:lnSpc>
@@ -5794,7 +5357,7 @@
           <a:bodyPr wrap="square" lIns="0" tIns="0" rIns="0" bIns="0" rtlCol="0" anchor="ctr"/>
           <a:lstStyle/>
           <a:p>
-            <a:pPr indent="0" marL="0">
+            <a:pPr marL="0" indent="0">
               <a:buNone/>
             </a:pPr>
             <a:r>
@@ -5833,7 +5396,7 @@
           <a:bodyPr wrap="square" lIns="0" tIns="0" rIns="0" bIns="0" rtlCol="0" anchor="ctr"/>
           <a:lstStyle/>
           <a:p>
-            <a:pPr indent="0" marL="0">
+            <a:pPr marL="0" indent="0">
               <a:lnSpc>
                 <a:spcPts val="1500"/>
               </a:lnSpc>
@@ -5880,13 +5443,20 @@
             <a:prstDash val="solid"/>
           </a:ln>
           <a:effectLst>
-            <a:outerShdw sx="100000" sy="100000" kx="0" ky="0" algn="bl" rotWithShape="0" blurRad="101600" dist="25400" dir="5400000">
+            <a:outerShdw blurRad="101600" dist="25400" dir="5400000" algn="bl" rotWithShape="0">
               <a:srgbClr val="9AA7B4">
                 <a:alpha val="28000"/>
               </a:srgbClr>
             </a:outerShdw>
           </a:effectLst>
         </p:spPr>
+        <p:txBody>
+          <a:bodyPr/>
+          <a:lstStyle/>
+          <a:p>
+            <a:endParaRPr lang="en-US"/>
+          </a:p>
+        </p:txBody>
       </p:sp>
       <p:sp>
         <p:nvSpPr>
@@ -5912,6 +5482,13 @@
             <a:prstDash val="solid"/>
           </a:ln>
         </p:spPr>
+        <p:txBody>
+          <a:bodyPr/>
+          <a:lstStyle/>
+          <a:p>
+            <a:endParaRPr lang="en-US"/>
+          </a:p>
+        </p:txBody>
       </p:sp>
       <p:sp>
         <p:nvSpPr>
@@ -5934,11 +5511,11 @@
           <a:bodyPr wrap="square" lIns="0" tIns="0" rIns="0" bIns="0" rtlCol="0" anchor="ctr"/>
           <a:lstStyle/>
           <a:p>
-            <a:pPr indent="0" marL="0">
+            <a:pPr marL="0" indent="0">
               <a:buNone/>
             </a:pPr>
             <a:r>
-              <a:rPr lang="en-US" sz="1150" b="1" spc="150" kern="0" dirty="0">
+              <a:rPr lang="en-US" sz="1150" b="1" kern="0" spc="150" dirty="0">
                 <a:solidFill>
                   <a:srgbClr val="FFFFFF"/>
                 </a:solidFill>
@@ -5976,6 +5553,13 @@
             <a:prstDash val="solid"/>
           </a:ln>
         </p:spPr>
+        <p:txBody>
+          <a:bodyPr/>
+          <a:lstStyle/>
+          <a:p>
+            <a:endParaRPr lang="en-US"/>
+          </a:p>
+        </p:txBody>
       </p:sp>
       <p:sp>
         <p:nvSpPr>
@@ -5998,7 +5582,7 @@
           <a:bodyPr wrap="square" lIns="0" tIns="0" rIns="0" bIns="0" rtlCol="0" anchor="ctr"/>
           <a:lstStyle/>
           <a:p>
-            <a:pPr indent="0" marL="0">
+            <a:pPr marL="0" indent="0">
               <a:buNone/>
             </a:pPr>
             <a:r>
@@ -6037,7 +5621,7 @@
           <a:bodyPr wrap="square" lIns="0" tIns="0" rIns="0" bIns="0" rtlCol="0" anchor="ctr"/>
           <a:lstStyle/>
           <a:p>
-            <a:pPr indent="0" marL="0">
+            <a:pPr marL="0" indent="0">
               <a:buNone/>
             </a:pPr>
             <a:r>
@@ -6079,6 +5663,13 @@
             <a:prstDash val="solid"/>
           </a:ln>
         </p:spPr>
+        <p:txBody>
+          <a:bodyPr/>
+          <a:lstStyle/>
+          <a:p>
+            <a:endParaRPr lang="en-US"/>
+          </a:p>
+        </p:txBody>
       </p:sp>
       <p:sp>
         <p:nvSpPr>
@@ -6101,7 +5692,7 @@
           <a:bodyPr wrap="square" lIns="0" tIns="0" rIns="0" bIns="0" rtlCol="0" anchor="ctr"/>
           <a:lstStyle/>
           <a:p>
-            <a:pPr indent="0" marL="0">
+            <a:pPr marL="0" indent="0">
               <a:buNone/>
             </a:pPr>
             <a:r>
@@ -6140,7 +5731,7 @@
           <a:bodyPr wrap="square" lIns="0" tIns="0" rIns="0" bIns="0" rtlCol="0" anchor="ctr"/>
           <a:lstStyle/>
           <a:p>
-            <a:pPr indent="0" marL="0">
+            <a:pPr marL="0" indent="0">
               <a:buNone/>
             </a:pPr>
             <a:r>
@@ -6182,6 +5773,13 @@
             <a:prstDash val="solid"/>
           </a:ln>
         </p:spPr>
+        <p:txBody>
+          <a:bodyPr/>
+          <a:lstStyle/>
+          <a:p>
+            <a:endParaRPr lang="en-US"/>
+          </a:p>
+        </p:txBody>
       </p:sp>
       <p:sp>
         <p:nvSpPr>
@@ -6204,7 +5802,7 @@
           <a:bodyPr wrap="square" lIns="0" tIns="0" rIns="0" bIns="0" rtlCol="0" anchor="ctr"/>
           <a:lstStyle/>
           <a:p>
-            <a:pPr indent="0" marL="0">
+            <a:pPr marL="0" indent="0">
               <a:buNone/>
             </a:pPr>
             <a:r>
@@ -6243,7 +5841,7 @@
           <a:bodyPr wrap="square" lIns="0" tIns="0" rIns="0" bIns="0" rtlCol="0" anchor="ctr"/>
           <a:lstStyle/>
           <a:p>
-            <a:pPr indent="0" marL="0">
+            <a:pPr marL="0" indent="0">
               <a:buNone/>
             </a:pPr>
             <a:r>
@@ -6285,6 +5883,13 @@
             <a:prstDash val="solid"/>
           </a:ln>
         </p:spPr>
+        <p:txBody>
+          <a:bodyPr/>
+          <a:lstStyle/>
+          <a:p>
+            <a:endParaRPr lang="en-US"/>
+          </a:p>
+        </p:txBody>
       </p:sp>
       <p:sp>
         <p:nvSpPr>
@@ -6307,7 +5912,7 @@
           <a:bodyPr wrap="square" lIns="0" tIns="0" rIns="0" bIns="0" rtlCol="0" anchor="ctr"/>
           <a:lstStyle/>
           <a:p>
-            <a:pPr indent="0" marL="0">
+            <a:pPr marL="0" indent="0">
               <a:buNone/>
             </a:pPr>
             <a:r>
@@ -6346,7 +5951,7 @@
           <a:bodyPr wrap="square" lIns="0" tIns="0" rIns="0" bIns="0" rtlCol="0" anchor="ctr"/>
           <a:lstStyle/>
           <a:p>
-            <a:pPr indent="0" marL="0">
+            <a:pPr marL="0" indent="0">
               <a:buNone/>
             </a:pPr>
             <a:r>
@@ -6388,6 +5993,13 @@
             <a:prstDash val="solid"/>
           </a:ln>
         </p:spPr>
+        <p:txBody>
+          <a:bodyPr/>
+          <a:lstStyle/>
+          <a:p>
+            <a:endParaRPr lang="en-US"/>
+          </a:p>
+        </p:txBody>
       </p:sp>
       <p:sp>
         <p:nvSpPr>
@@ -6410,7 +6022,7 @@
           <a:bodyPr wrap="square" lIns="0" tIns="0" rIns="0" bIns="0" rtlCol="0" anchor="ctr"/>
           <a:lstStyle/>
           <a:p>
-            <a:pPr indent="0" marL="0">
+            <a:pPr marL="0" indent="0">
               <a:buNone/>
             </a:pPr>
             <a:r>
@@ -6449,7 +6061,7 @@
           <a:bodyPr wrap="square" lIns="0" tIns="0" rIns="0" bIns="0" rtlCol="0" anchor="ctr"/>
           <a:lstStyle/>
           <a:p>
-            <a:pPr indent="0" marL="0">
+            <a:pPr marL="0" indent="0">
               <a:buNone/>
             </a:pPr>
             <a:r>
@@ -6488,7 +6100,7 @@
           <a:bodyPr wrap="square" lIns="0" tIns="0" rIns="0" bIns="0" rtlCol="0" anchor="ctr"/>
           <a:lstStyle/>
           <a:p>
-            <a:pPr indent="0" marL="0">
+            <a:pPr marL="0" indent="0">
               <a:buNone/>
             </a:pPr>
             <a:r>
@@ -6522,6 +6134,7 @@
         <a:solidFill>
           <a:srgbClr val="16283C"/>
         </a:solidFill>
+        <a:effectLst/>
       </p:bgPr>
     </p:bg>
     <p:spTree>
@@ -6559,7 +6172,7 @@
           <a:bodyPr wrap="square" lIns="0" tIns="0" rIns="0" bIns="0" rtlCol="0" anchor="ctr"/>
           <a:lstStyle/>
           <a:p>
-            <a:pPr algn="ctr" indent="0" marL="0">
+            <a:pPr marL="0" indent="0" algn="ctr">
               <a:buNone/>
             </a:pPr>
             <a:r>
@@ -6598,7 +6211,7 @@
           <a:bodyPr wrap="square" lIns="0" tIns="0" rIns="0" bIns="0" rtlCol="0" anchor="ctr"/>
           <a:lstStyle/>
           <a:p>
-            <a:pPr algn="ctr" indent="0" marL="0">
+            <a:pPr marL="0" indent="0" algn="ctr">
               <a:lnSpc>
                 <a:spcPts val="3800"/>
               </a:lnSpc>
@@ -6618,7 +6231,7 @@
             <a:endParaRPr lang="en-US" sz="2200" dirty="0"/>
           </a:p>
           <a:p>
-            <a:pPr algn="ctr" indent="0" marL="0">
+            <a:pPr marL="0" indent="0" algn="ctr">
               <a:lnSpc>
                 <a:spcPts val="3800"/>
               </a:lnSpc>
@@ -6638,7 +6251,7 @@
             <a:endParaRPr lang="en-US" sz="2200" dirty="0"/>
           </a:p>
           <a:p>
-            <a:pPr algn="ctr" indent="0" marL="0">
+            <a:pPr marL="0" indent="0" algn="ctr">
               <a:lnSpc>
                 <a:spcPts val="3800"/>
               </a:lnSpc>
@@ -6683,6 +6296,13 @@
             <a:prstDash val="solid"/>
           </a:ln>
         </p:spPr>
+        <p:txBody>
+          <a:bodyPr/>
+          <a:lstStyle/>
+          <a:p>
+            <a:endParaRPr lang="en-US"/>
+          </a:p>
+        </p:txBody>
       </p:sp>
       <p:sp>
         <p:nvSpPr>
@@ -6705,7 +6325,7 @@
           <a:bodyPr wrap="square" lIns="0" tIns="0" rIns="0" bIns="0" rtlCol="0" anchor="ctr"/>
           <a:lstStyle/>
           <a:p>
-            <a:pPr algn="ctr" indent="0" marL="0">
+            <a:pPr marL="0" indent="0" algn="ctr">
               <a:buNone/>
             </a:pPr>
             <a:r>
@@ -6739,6 +6359,7 @@
         <a:solidFill>
           <a:srgbClr val="FFFFFF"/>
         </a:solidFill>
+        <a:effectLst/>
       </p:bgPr>
     </p:bg>
     <p:spTree>
@@ -6776,11 +6397,11 @@
           <a:bodyPr wrap="square" lIns="0" tIns="0" rIns="0" bIns="0" rtlCol="0" anchor="ctr"/>
           <a:lstStyle/>
           <a:p>
-            <a:pPr indent="0" marL="0">
+            <a:pPr marL="0" indent="0">
               <a:buNone/>
             </a:pPr>
             <a:r>
-              <a:rPr lang="en-US" sz="1100" b="1" spc="200" kern="0" dirty="0">
+              <a:rPr lang="en-US" sz="1100" b="1" kern="0" spc="200" dirty="0">
                 <a:solidFill>
                   <a:srgbClr val="E8A33D"/>
                 </a:solidFill>
@@ -6820,6 +6441,13 @@
             <a:prstDash val="solid"/>
           </a:ln>
         </p:spPr>
+        <p:txBody>
+          <a:bodyPr/>
+          <a:lstStyle/>
+          <a:p>
+            <a:endParaRPr lang="en-US"/>
+          </a:p>
+        </p:txBody>
       </p:sp>
       <p:sp>
         <p:nvSpPr>
@@ -6842,7 +6470,7 @@
           <a:bodyPr wrap="square" lIns="0" tIns="0" rIns="0" bIns="0" rtlCol="0" anchor="ctr"/>
           <a:lstStyle/>
           <a:p>
-            <a:pPr algn="ctr" indent="0" marL="0">
+            <a:pPr marL="0" indent="0" algn="ctr">
               <a:buNone/>
             </a:pPr>
             <a:r>
@@ -6881,7 +6509,7 @@
           <a:bodyPr wrap="square" lIns="0" tIns="0" rIns="0" bIns="0" rtlCol="0" anchor="ctr"/>
           <a:lstStyle/>
           <a:p>
-            <a:pPr indent="0" marL="0">
+            <a:pPr marL="0" indent="0">
               <a:buNone/>
             </a:pPr>
             <a:r>
@@ -6908,23 +6536,34 @@
           <p:nvPr>
             <p:extLst>
               <p:ext uri="{D42A27DB-BD31-4B8C-83A1-F6EECF244321}">
-                <p14:modId xmlns:p14="http://schemas.microsoft.com/office/powerpoint/2010/main" val="1579011935"/>
+                <p14:modId xmlns:p14="http://schemas.microsoft.com/office/powerpoint/2010/main" val="3652843705"/>
               </p:ext>
             </p:extLst>
           </p:nvPr>
         </p:nvGraphicFramePr>
         <p:xfrm>
           <a:off x="566928" y="1280160"/>
-          <a:ext cx="11055096" cy="914400"/>
+          <a:ext cx="6858000" cy="3621024"/>
         </p:xfrm>
         <a:graphic>
           <a:graphicData uri="http://schemas.openxmlformats.org/drawingml/2006/table">
             <a:tbl>
               <a:tblPr/>
               <a:tblGrid>
-                <a:gridCol w="2651760"/>
-                <a:gridCol w="4206240"/>
-                <a:gridCol w="4197096"/>
+                <a:gridCol w="2651760">
+                  <a:extLst>
+                    <a:ext uri="{9D8B030D-6E8A-4147-A177-3AD203B41FA5}">
+                      <a16:colId xmlns:a16="http://schemas.microsoft.com/office/drawing/2014/main" val="20000"/>
+                    </a:ext>
+                  </a:extLst>
+                </a:gridCol>
+                <a:gridCol w="4206240">
+                  <a:extLst>
+                    <a:ext uri="{9D8B030D-6E8A-4147-A177-3AD203B41FA5}">
+                      <a16:colId xmlns:a16="http://schemas.microsoft.com/office/drawing/2014/main" val="20001"/>
+                    </a:ext>
+                  </a:extLst>
+                </a:gridCol>
               </a:tblGrid>
               <a:tr h="603504">
                 <a:tc>
@@ -6932,7 +6571,7 @@
                     <a:bodyPr/>
                     <a:lstStyle/>
                     <a:p>
-                      <a:pPr indent="0" marL="0">
+                      <a:pPr marL="0" indent="0">
                         <a:buNone/>
                       </a:pPr>
                       <a:r>
@@ -7000,7 +6639,7 @@
                     <a:bodyPr/>
                     <a:lstStyle/>
                     <a:p>
-                      <a:pPr indent="0" marL="0">
+                      <a:pPr marL="0" indent="0">
                         <a:buNone/>
                       </a:pPr>
                       <a:r>
@@ -7063,74 +6702,11 @@
                     </a:solidFill>
                   </a:tcPr>
                 </a:tc>
-                <a:tc>
-                  <a:txBody>
-                    <a:bodyPr/>
-                    <a:lstStyle/>
-                    <a:p>
-                      <a:pPr indent="0" marL="0">
-                        <a:buNone/>
-                      </a:pPr>
-                      <a:r>
-                        <a:rPr lang="en-US" sz="1100" b="1" dirty="0">
-                          <a:solidFill>
-                            <a:srgbClr val="FFFFFF"/>
-                          </a:solidFill>
-                          <a:latin typeface="Calibri" pitchFamily="34" charset="0"/>
-                          <a:ea typeface="Calibri" pitchFamily="34" charset="-122"/>
-                          <a:cs typeface="Calibri" pitchFamily="34" charset="-120"/>
-                        </a:rPr>
-                        <a:t>WHAT IT ARGUES FOR OR AGAINST</a:t>
-                      </a:r>
-                      <a:endParaRPr lang="en-US" sz="1100" dirty="0">
-                        <a:latin typeface="Calibri" charset="0"/>
-                        <a:ea typeface="Calibri" charset="0"/>
-                        <a:cs typeface="Calibri" charset="0"/>
-                      </a:endParaRPr>
-                    </a:p>
-                  </a:txBody>
-                  <a:tcPr marL="76200" marR="76200" marT="76200" marB="76200" anchor="ctr">
-                    <a:lnL w="6350" cap="flat" cmpd="sng" algn="ctr">
-                      <a:solidFill>
-                        <a:srgbClr val="DDE4EA"/>
-                      </a:solidFill>
-                      <a:prstDash val="solid"/>
-                      <a:round/>
-                      <a:headEnd type="none" w="med" len="med"/>
-                      <a:tailEnd type="none" w="med" len="med"/>
-                    </a:lnL>
-                    <a:lnR w="6350" cap="flat" cmpd="sng" algn="ctr">
-                      <a:solidFill>
-                        <a:srgbClr val="DDE4EA"/>
-                      </a:solidFill>
-                      <a:prstDash val="solid"/>
-                      <a:round/>
-                      <a:headEnd type="none" w="med" len="med"/>
-                      <a:tailEnd type="none" w="med" len="med"/>
-                    </a:lnR>
-                    <a:lnT w="6350" cap="flat" cmpd="sng" algn="ctr">
-                      <a:solidFill>
-                        <a:srgbClr val="DDE4EA"/>
-                      </a:solidFill>
-                      <a:prstDash val="solid"/>
-                      <a:round/>
-                      <a:headEnd type="none" w="med" len="med"/>
-                      <a:tailEnd type="none" w="med" len="med"/>
-                    </a:lnT>
-                    <a:lnB w="6350" cap="flat" cmpd="sng" algn="ctr">
-                      <a:solidFill>
-                        <a:srgbClr val="DDE4EA"/>
-                      </a:solidFill>
-                      <a:prstDash val="solid"/>
-                      <a:round/>
-                      <a:headEnd type="none" w="med" len="med"/>
-                      <a:tailEnd type="none" w="med" len="med"/>
-                    </a:lnB>
-                    <a:solidFill>
-                      <a:srgbClr val="16283C"/>
-                    </a:solidFill>
-                  </a:tcPr>
-                </a:tc>
+                <a:extLst>
+                  <a:ext uri="{0D108BD9-81ED-4DB2-BD59-A6C34878D82A}">
+                    <a16:rowId xmlns:a16="http://schemas.microsoft.com/office/drawing/2014/main" val="10000"/>
+                  </a:ext>
+                </a:extLst>
               </a:tr>
               <a:tr h="603504">
                 <a:tc>
@@ -7138,7 +6714,7 @@
                     <a:bodyPr/>
                     <a:lstStyle/>
                     <a:p>
-                      <a:pPr indent="0" marL="0">
+                      <a:pPr marL="0" indent="0">
                         <a:buNone/>
                       </a:pPr>
                       <a:r>
@@ -7206,7 +6782,7 @@
                     <a:bodyPr/>
                     <a:lstStyle/>
                     <a:p>
-                      <a:pPr indent="0" marL="0">
+                      <a:pPr marL="0" indent="0">
                         <a:buNone/>
                       </a:pPr>
                       <a:r>
@@ -7269,74 +6845,11 @@
                     </a:solidFill>
                   </a:tcPr>
                 </a:tc>
-                <a:tc>
-                  <a:txBody>
-                    <a:bodyPr/>
-                    <a:lstStyle/>
-                    <a:p>
-                      <a:pPr indent="0" marL="0">
-                        <a:buNone/>
-                      </a:pPr>
-                      <a:r>
-                        <a:rPr lang="en-US" sz="1100" i="1" dirty="0">
-                          <a:solidFill>
-                            <a:srgbClr val="8A97A4"/>
-                          </a:solidFill>
-                          <a:latin typeface="Calibri" pitchFamily="34" charset="0"/>
-                          <a:ea typeface="Calibri" pitchFamily="34" charset="-122"/>
-                          <a:cs typeface="Calibri" pitchFamily="34" charset="-120"/>
-                        </a:rPr>
-                        <a:t>[what this moves]</a:t>
-                      </a:r>
-                      <a:endParaRPr lang="en-US" sz="1100" dirty="0">
-                        <a:latin typeface="Calibri" charset="0"/>
-                        <a:ea typeface="Calibri" charset="0"/>
-                        <a:cs typeface="Calibri" charset="0"/>
-                      </a:endParaRPr>
-                    </a:p>
-                  </a:txBody>
-                  <a:tcPr marL="76200" marR="76200" marT="76200" marB="76200" anchor="ctr">
-                    <a:lnL w="6350" cap="flat" cmpd="sng" algn="ctr">
-                      <a:solidFill>
-                        <a:srgbClr val="DDE4EA"/>
-                      </a:solidFill>
-                      <a:prstDash val="solid"/>
-                      <a:round/>
-                      <a:headEnd type="none" w="med" len="med"/>
-                      <a:tailEnd type="none" w="med" len="med"/>
-                    </a:lnL>
-                    <a:lnR w="6350" cap="flat" cmpd="sng" algn="ctr">
-                      <a:solidFill>
-                        <a:srgbClr val="DDE4EA"/>
-                      </a:solidFill>
-                      <a:prstDash val="solid"/>
-                      <a:round/>
-                      <a:headEnd type="none" w="med" len="med"/>
-                      <a:tailEnd type="none" w="med" len="med"/>
-                    </a:lnR>
-                    <a:lnT w="6350" cap="flat" cmpd="sng" algn="ctr">
-                      <a:solidFill>
-                        <a:srgbClr val="DDE4EA"/>
-                      </a:solidFill>
-                      <a:prstDash val="solid"/>
-                      <a:round/>
-                      <a:headEnd type="none" w="med" len="med"/>
-                      <a:tailEnd type="none" w="med" len="med"/>
-                    </a:lnT>
-                    <a:lnB w="6350" cap="flat" cmpd="sng" algn="ctr">
-                      <a:solidFill>
-                        <a:srgbClr val="DDE4EA"/>
-                      </a:solidFill>
-                      <a:prstDash val="solid"/>
-                      <a:round/>
-                      <a:headEnd type="none" w="med" len="med"/>
-                      <a:tailEnd type="none" w="med" len="med"/>
-                    </a:lnB>
-                    <a:solidFill>
-                      <a:srgbClr val="FFFFFF"/>
-                    </a:solidFill>
-                  </a:tcPr>
-                </a:tc>
+                <a:extLst>
+                  <a:ext uri="{0D108BD9-81ED-4DB2-BD59-A6C34878D82A}">
+                    <a16:rowId xmlns:a16="http://schemas.microsoft.com/office/drawing/2014/main" val="10001"/>
+                  </a:ext>
+                </a:extLst>
               </a:tr>
               <a:tr h="603504">
                 <a:tc>
@@ -7344,7 +6857,7 @@
                     <a:bodyPr/>
                     <a:lstStyle/>
                     <a:p>
-                      <a:pPr indent="0" marL="0">
+                      <a:pPr marL="0" indent="0">
                         <a:buNone/>
                       </a:pPr>
                       <a:r>
@@ -7412,7 +6925,7 @@
                     <a:bodyPr/>
                     <a:lstStyle/>
                     <a:p>
-                      <a:pPr indent="0" marL="0">
+                      <a:pPr marL="0" indent="0">
                         <a:buNone/>
                       </a:pPr>
                       <a:r>
@@ -7475,74 +6988,11 @@
                     </a:solidFill>
                   </a:tcPr>
                 </a:tc>
-                <a:tc>
-                  <a:txBody>
-                    <a:bodyPr/>
-                    <a:lstStyle/>
-                    <a:p>
-                      <a:pPr indent="0" marL="0">
-                        <a:buNone/>
-                      </a:pPr>
-                      <a:r>
-                        <a:rPr lang="en-US" sz="1100" i="1" dirty="0">
-                          <a:solidFill>
-                            <a:srgbClr val="8A97A4"/>
-                          </a:solidFill>
-                          <a:latin typeface="Calibri" pitchFamily="34" charset="0"/>
-                          <a:ea typeface="Calibri" pitchFamily="34" charset="-122"/>
-                          <a:cs typeface="Calibri" pitchFamily="34" charset="-120"/>
-                        </a:rPr>
-                        <a:t>[what this moves]</a:t>
-                      </a:r>
-                      <a:endParaRPr lang="en-US" sz="1100" dirty="0">
-                        <a:latin typeface="Calibri" charset="0"/>
-                        <a:ea typeface="Calibri" charset="0"/>
-                        <a:cs typeface="Calibri" charset="0"/>
-                      </a:endParaRPr>
-                    </a:p>
-                  </a:txBody>
-                  <a:tcPr marL="76200" marR="76200" marT="76200" marB="76200" anchor="ctr">
-                    <a:lnL w="6350" cap="flat" cmpd="sng" algn="ctr">
-                      <a:solidFill>
-                        <a:srgbClr val="DDE4EA"/>
-                      </a:solidFill>
-                      <a:prstDash val="solid"/>
-                      <a:round/>
-                      <a:headEnd type="none" w="med" len="med"/>
-                      <a:tailEnd type="none" w="med" len="med"/>
-                    </a:lnL>
-                    <a:lnR w="6350" cap="flat" cmpd="sng" algn="ctr">
-                      <a:solidFill>
-                        <a:srgbClr val="DDE4EA"/>
-                      </a:solidFill>
-                      <a:prstDash val="solid"/>
-                      <a:round/>
-                      <a:headEnd type="none" w="med" len="med"/>
-                      <a:tailEnd type="none" w="med" len="med"/>
-                    </a:lnR>
-                    <a:lnT w="6350" cap="flat" cmpd="sng" algn="ctr">
-                      <a:solidFill>
-                        <a:srgbClr val="DDE4EA"/>
-                      </a:solidFill>
-                      <a:prstDash val="solid"/>
-                      <a:round/>
-                      <a:headEnd type="none" w="med" len="med"/>
-                      <a:tailEnd type="none" w="med" len="med"/>
-                    </a:lnT>
-                    <a:lnB w="6350" cap="flat" cmpd="sng" algn="ctr">
-                      <a:solidFill>
-                        <a:srgbClr val="DDE4EA"/>
-                      </a:solidFill>
-                      <a:prstDash val="solid"/>
-                      <a:round/>
-                      <a:headEnd type="none" w="med" len="med"/>
-                      <a:tailEnd type="none" w="med" len="med"/>
-                    </a:lnB>
-                    <a:solidFill>
-                      <a:srgbClr val="F7F9FB"/>
-                    </a:solidFill>
-                  </a:tcPr>
-                </a:tc>
+                <a:extLst>
+                  <a:ext uri="{0D108BD9-81ED-4DB2-BD59-A6C34878D82A}">
+                    <a16:rowId xmlns:a16="http://schemas.microsoft.com/office/drawing/2014/main" val="10002"/>
+                  </a:ext>
+                </a:extLst>
               </a:tr>
               <a:tr h="603504">
                 <a:tc>
@@ -7550,7 +7000,7 @@
                     <a:bodyPr/>
                     <a:lstStyle/>
                     <a:p>
-                      <a:pPr indent="0" marL="0">
+                      <a:pPr marL="0" indent="0">
                         <a:buNone/>
                       </a:pPr>
                       <a:r>
@@ -7618,7 +7068,7 @@
                     <a:bodyPr/>
                     <a:lstStyle/>
                     <a:p>
-                      <a:pPr indent="0" marL="0">
+                      <a:pPr marL="0" indent="0">
                         <a:buNone/>
                       </a:pPr>
                       <a:r>
@@ -7681,74 +7131,11 @@
                     </a:solidFill>
                   </a:tcPr>
                 </a:tc>
-                <a:tc>
-                  <a:txBody>
-                    <a:bodyPr/>
-                    <a:lstStyle/>
-                    <a:p>
-                      <a:pPr indent="0" marL="0">
-                        <a:buNone/>
-                      </a:pPr>
-                      <a:r>
-                        <a:rPr lang="en-US" sz="1100" i="1" dirty="0">
-                          <a:solidFill>
-                            <a:srgbClr val="8A97A4"/>
-                          </a:solidFill>
-                          <a:latin typeface="Calibri" pitchFamily="34" charset="0"/>
-                          <a:ea typeface="Calibri" pitchFamily="34" charset="-122"/>
-                          <a:cs typeface="Calibri" pitchFamily="34" charset="-120"/>
-                        </a:rPr>
-                        <a:t>[what this moves]</a:t>
-                      </a:r>
-                      <a:endParaRPr lang="en-US" sz="1100" dirty="0">
-                        <a:latin typeface="Calibri" charset="0"/>
-                        <a:ea typeface="Calibri" charset="0"/>
-                        <a:cs typeface="Calibri" charset="0"/>
-                      </a:endParaRPr>
-                    </a:p>
-                  </a:txBody>
-                  <a:tcPr marL="76200" marR="76200" marT="76200" marB="76200" anchor="ctr">
-                    <a:lnL w="6350" cap="flat" cmpd="sng" algn="ctr">
-                      <a:solidFill>
-                        <a:srgbClr val="DDE4EA"/>
-                      </a:solidFill>
-                      <a:prstDash val="solid"/>
-                      <a:round/>
-                      <a:headEnd type="none" w="med" len="med"/>
-                      <a:tailEnd type="none" w="med" len="med"/>
-                    </a:lnL>
-                    <a:lnR w="6350" cap="flat" cmpd="sng" algn="ctr">
-                      <a:solidFill>
-                        <a:srgbClr val="DDE4EA"/>
-                      </a:solidFill>
-                      <a:prstDash val="solid"/>
-                      <a:round/>
-                      <a:headEnd type="none" w="med" len="med"/>
-                      <a:tailEnd type="none" w="med" len="med"/>
-                    </a:lnR>
-                    <a:lnT w="6350" cap="flat" cmpd="sng" algn="ctr">
-                      <a:solidFill>
-                        <a:srgbClr val="DDE4EA"/>
-                      </a:solidFill>
-                      <a:prstDash val="solid"/>
-                      <a:round/>
-                      <a:headEnd type="none" w="med" len="med"/>
-                      <a:tailEnd type="none" w="med" len="med"/>
-                    </a:lnT>
-                    <a:lnB w="6350" cap="flat" cmpd="sng" algn="ctr">
-                      <a:solidFill>
-                        <a:srgbClr val="DDE4EA"/>
-                      </a:solidFill>
-                      <a:prstDash val="solid"/>
-                      <a:round/>
-                      <a:headEnd type="none" w="med" len="med"/>
-                      <a:tailEnd type="none" w="med" len="med"/>
-                    </a:lnB>
-                    <a:solidFill>
-                      <a:srgbClr val="FFFFFF"/>
-                    </a:solidFill>
-                  </a:tcPr>
-                </a:tc>
+                <a:extLst>
+                  <a:ext uri="{0D108BD9-81ED-4DB2-BD59-A6C34878D82A}">
+                    <a16:rowId xmlns:a16="http://schemas.microsoft.com/office/drawing/2014/main" val="10003"/>
+                  </a:ext>
+                </a:extLst>
               </a:tr>
               <a:tr h="603504">
                 <a:tc>
@@ -7756,7 +7143,7 @@
                     <a:bodyPr/>
                     <a:lstStyle/>
                     <a:p>
-                      <a:pPr indent="0" marL="0">
+                      <a:pPr marL="0" indent="0">
                         <a:buNone/>
                       </a:pPr>
                       <a:r>
@@ -7824,7 +7211,7 @@
                     <a:bodyPr/>
                     <a:lstStyle/>
                     <a:p>
-                      <a:pPr indent="0" marL="0">
+                      <a:pPr marL="0" indent="0">
                         <a:buNone/>
                       </a:pPr>
                       <a:r>
@@ -7887,74 +7274,11 @@
                     </a:solidFill>
                   </a:tcPr>
                 </a:tc>
-                <a:tc>
-                  <a:txBody>
-                    <a:bodyPr/>
-                    <a:lstStyle/>
-                    <a:p>
-                      <a:pPr indent="0" marL="0">
-                        <a:buNone/>
-                      </a:pPr>
-                      <a:r>
-                        <a:rPr lang="en-US" sz="1100" i="1" dirty="0">
-                          <a:solidFill>
-                            <a:srgbClr val="8A97A4"/>
-                          </a:solidFill>
-                          <a:latin typeface="Calibri" pitchFamily="34" charset="0"/>
-                          <a:ea typeface="Calibri" pitchFamily="34" charset="-122"/>
-                          <a:cs typeface="Calibri" pitchFamily="34" charset="-120"/>
-                        </a:rPr>
-                        <a:t>[what this moves]</a:t>
-                      </a:r>
-                      <a:endParaRPr lang="en-US" sz="1100" dirty="0">
-                        <a:latin typeface="Calibri" charset="0"/>
-                        <a:ea typeface="Calibri" charset="0"/>
-                        <a:cs typeface="Calibri" charset="0"/>
-                      </a:endParaRPr>
-                    </a:p>
-                  </a:txBody>
-                  <a:tcPr marL="76200" marR="76200" marT="76200" marB="76200" anchor="ctr">
-                    <a:lnL w="6350" cap="flat" cmpd="sng" algn="ctr">
-                      <a:solidFill>
-                        <a:srgbClr val="DDE4EA"/>
-                      </a:solidFill>
-                      <a:prstDash val="solid"/>
-                      <a:round/>
-                      <a:headEnd type="none" w="med" len="med"/>
-                      <a:tailEnd type="none" w="med" len="med"/>
-                    </a:lnL>
-                    <a:lnR w="6350" cap="flat" cmpd="sng" algn="ctr">
-                      <a:solidFill>
-                        <a:srgbClr val="DDE4EA"/>
-                      </a:solidFill>
-                      <a:prstDash val="solid"/>
-                      <a:round/>
-                      <a:headEnd type="none" w="med" len="med"/>
-                      <a:tailEnd type="none" w="med" len="med"/>
-                    </a:lnR>
-                    <a:lnT w="6350" cap="flat" cmpd="sng" algn="ctr">
-                      <a:solidFill>
-                        <a:srgbClr val="DDE4EA"/>
-                      </a:solidFill>
-                      <a:prstDash val="solid"/>
-                      <a:round/>
-                      <a:headEnd type="none" w="med" len="med"/>
-                      <a:tailEnd type="none" w="med" len="med"/>
-                    </a:lnT>
-                    <a:lnB w="6350" cap="flat" cmpd="sng" algn="ctr">
-                      <a:solidFill>
-                        <a:srgbClr val="DDE4EA"/>
-                      </a:solidFill>
-                      <a:prstDash val="solid"/>
-                      <a:round/>
-                      <a:headEnd type="none" w="med" len="med"/>
-                      <a:tailEnd type="none" w="med" len="med"/>
-                    </a:lnB>
-                    <a:solidFill>
-                      <a:srgbClr val="F7F9FB"/>
-                    </a:solidFill>
-                  </a:tcPr>
-                </a:tc>
+                <a:extLst>
+                  <a:ext uri="{0D108BD9-81ED-4DB2-BD59-A6C34878D82A}">
+                    <a16:rowId xmlns:a16="http://schemas.microsoft.com/office/drawing/2014/main" val="10004"/>
+                  </a:ext>
+                </a:extLst>
               </a:tr>
               <a:tr h="603504">
                 <a:tc>
@@ -7962,7 +7286,7 @@
                     <a:bodyPr/>
                     <a:lstStyle/>
                     <a:p>
-                      <a:pPr indent="0" marL="0">
+                      <a:pPr marL="0" indent="0">
                         <a:buNone/>
                       </a:pPr>
                       <a:r>
@@ -8030,7 +7354,7 @@
                     <a:bodyPr/>
                     <a:lstStyle/>
                     <a:p>
-                      <a:pPr indent="0" marL="0">
+                      <a:pPr marL="0" indent="0">
                         <a:buNone/>
                       </a:pPr>
                       <a:r>
@@ -8093,194 +7417,16 @@
                     </a:solidFill>
                   </a:tcPr>
                 </a:tc>
-                <a:tc>
-                  <a:txBody>
-                    <a:bodyPr/>
-                    <a:lstStyle/>
-                    <a:p>
-                      <a:pPr indent="0" marL="0">
-                        <a:buNone/>
-                      </a:pPr>
-                      <a:r>
-                        <a:rPr lang="en-US" sz="1100" i="1" dirty="0">
-                          <a:solidFill>
-                            <a:srgbClr val="8A97A4"/>
-                          </a:solidFill>
-                          <a:latin typeface="Calibri" pitchFamily="34" charset="0"/>
-                          <a:ea typeface="Calibri" pitchFamily="34" charset="-122"/>
-                          <a:cs typeface="Calibri" pitchFamily="34" charset="-120"/>
-                        </a:rPr>
-                        <a:t>[what this moves]</a:t>
-                      </a:r>
-                      <a:endParaRPr lang="en-US" sz="1100" dirty="0">
-                        <a:latin typeface="Calibri" charset="0"/>
-                        <a:ea typeface="Calibri" charset="0"/>
-                        <a:cs typeface="Calibri" charset="0"/>
-                      </a:endParaRPr>
-                    </a:p>
-                  </a:txBody>
-                  <a:tcPr marL="76200" marR="76200" marT="76200" marB="76200" anchor="ctr">
-                    <a:lnL w="6350" cap="flat" cmpd="sng" algn="ctr">
-                      <a:solidFill>
-                        <a:srgbClr val="DDE4EA"/>
-                      </a:solidFill>
-                      <a:prstDash val="solid"/>
-                      <a:round/>
-                      <a:headEnd type="none" w="med" len="med"/>
-                      <a:tailEnd type="none" w="med" len="med"/>
-                    </a:lnL>
-                    <a:lnR w="6350" cap="flat" cmpd="sng" algn="ctr">
-                      <a:solidFill>
-                        <a:srgbClr val="DDE4EA"/>
-                      </a:solidFill>
-                      <a:prstDash val="solid"/>
-                      <a:round/>
-                      <a:headEnd type="none" w="med" len="med"/>
-                      <a:tailEnd type="none" w="med" len="med"/>
-                    </a:lnR>
-                    <a:lnT w="6350" cap="flat" cmpd="sng" algn="ctr">
-                      <a:solidFill>
-                        <a:srgbClr val="DDE4EA"/>
-                      </a:solidFill>
-                      <a:prstDash val="solid"/>
-                      <a:round/>
-                      <a:headEnd type="none" w="med" len="med"/>
-                      <a:tailEnd type="none" w="med" len="med"/>
-                    </a:lnT>
-                    <a:lnB w="6350" cap="flat" cmpd="sng" algn="ctr">
-                      <a:solidFill>
-                        <a:srgbClr val="DDE4EA"/>
-                      </a:solidFill>
-                      <a:prstDash val="solid"/>
-                      <a:round/>
-                      <a:headEnd type="none" w="med" len="med"/>
-                      <a:tailEnd type="none" w="med" len="med"/>
-                    </a:lnB>
-                    <a:solidFill>
-                      <a:srgbClr val="FFFFFF"/>
-                    </a:solidFill>
-                  </a:tcPr>
-                </a:tc>
+                <a:extLst>
+                  <a:ext uri="{0D108BD9-81ED-4DB2-BD59-A6C34878D82A}">
+                    <a16:rowId xmlns:a16="http://schemas.microsoft.com/office/drawing/2014/main" val="10005"/>
+                  </a:ext>
+                </a:extLst>
               </a:tr>
             </a:tbl>
           </a:graphicData>
         </a:graphic>
       </p:graphicFrame>
-      <p:sp>
-        <p:nvSpPr>
-          <p:cNvPr id="7" name="Shape 4"/>
-          <p:cNvSpPr/>
-          <p:nvPr/>
-        </p:nvSpPr>
-        <p:spPr>
-          <a:xfrm>
-            <a:off x="566928" y="5029200"/>
-            <a:ext cx="11055096" cy="1051560"/>
-          </a:xfrm>
-          <a:prstGeom prst="roundRect">
-            <a:avLst>
-              <a:gd name="adj" fmla="val 6957"/>
-            </a:avLst>
-          </a:prstGeom>
-          <a:solidFill>
-            <a:srgbClr val="EEF2F5"/>
-          </a:solidFill>
-          <a:ln w="12700">
-            <a:solidFill>
-              <a:srgbClr val="EEF2F5"/>
-            </a:solidFill>
-            <a:prstDash val="solid"/>
-          </a:ln>
-          <a:effectLst>
-            <a:outerShdw sx="100000" sy="100000" kx="0" ky="0" algn="bl" rotWithShape="0" blurRad="101600" dist="25400" dir="5400000">
-              <a:srgbClr val="9AA7B4">
-                <a:alpha val="28000"/>
-              </a:srgbClr>
-            </a:outerShdw>
-          </a:effectLst>
-        </p:spPr>
-      </p:sp>
-      <p:sp>
-        <p:nvSpPr>
-          <p:cNvPr id="8" name="Text 5"/>
-          <p:cNvSpPr/>
-          <p:nvPr/>
-        </p:nvSpPr>
-        <p:spPr>
-          <a:xfrm>
-            <a:off x="868680" y="5138928"/>
-            <a:ext cx="10424160" cy="274320"/>
-          </a:xfrm>
-          <a:prstGeom prst="rect">
-            <a:avLst/>
-          </a:prstGeom>
-          <a:noFill/>
-          <a:ln/>
-        </p:spPr>
-        <p:txBody>
-          <a:bodyPr wrap="square" lIns="0" tIns="0" rIns="0" bIns="0" rtlCol="0" anchor="ctr"/>
-          <a:lstStyle/>
-          <a:p>
-            <a:pPr indent="0" marL="0">
-              <a:buNone/>
-            </a:pPr>
-            <a:r>
-              <a:rPr lang="en-US" sz="1250" b="1" dirty="0">
-                <a:solidFill>
-                  <a:srgbClr val="16283C"/>
-                </a:solidFill>
-                <a:latin typeface="Calibri" pitchFamily="34" charset="0"/>
-                <a:ea typeface="Calibri" pitchFamily="34" charset="-122"/>
-                <a:cs typeface="Calibri" pitchFamily="34" charset="-120"/>
-              </a:rPr>
-              <a:t>Delete rows you did not have at this point in the case.</a:t>
-            </a:r>
-            <a:endParaRPr lang="en-US" sz="1250" dirty="0"/>
-          </a:p>
-        </p:txBody>
-      </p:sp>
-      <p:sp>
-        <p:nvSpPr>
-          <p:cNvPr id="9" name="Text 6"/>
-          <p:cNvSpPr/>
-          <p:nvPr/>
-        </p:nvSpPr>
-        <p:spPr>
-          <a:xfrm>
-            <a:off x="868680" y="5431536"/>
-            <a:ext cx="10424160" cy="548640"/>
-          </a:xfrm>
-          <a:prstGeom prst="rect">
-            <a:avLst/>
-          </a:prstGeom>
-          <a:noFill/>
-          <a:ln/>
-        </p:spPr>
-        <p:txBody>
-          <a:bodyPr wrap="square" lIns="0" tIns="0" rIns="0" bIns="0" rtlCol="0" anchor="ctr"/>
-          <a:lstStyle/>
-          <a:p>
-            <a:pPr indent="0" marL="0">
-              <a:lnSpc>
-                <a:spcPts val="1500"/>
-              </a:lnSpc>
-              <a:buNone/>
-            </a:pPr>
-            <a:r>
-              <a:rPr lang="en-US" sz="1150" dirty="0">
-                <a:solidFill>
-                  <a:srgbClr val="3D4855"/>
-                </a:solidFill>
-                <a:latin typeface="Calibri" pitchFamily="34" charset="0"/>
-                <a:ea typeface="Calibri" pitchFamily="34" charset="-122"/>
-                <a:cs typeface="Calibri" pitchFamily="34" charset="-120"/>
-              </a:rPr>
-              <a:t>Release only what the team actually had when the decision was made. Retrospective completeness is how a morning report turns back into a case conference — and it hands the group information the original team was reasoning without.</a:t>
-            </a:r>
-            <a:endParaRPr lang="en-US" sz="1150" dirty="0"/>
-          </a:p>
-        </p:txBody>
-      </p:sp>
     </p:spTree>
   </p:cSld>
   <p:clrMapOvr>
@@ -8297,6 +7443,7 @@
         <a:solidFill>
           <a:srgbClr val="16283C"/>
         </a:solidFill>
+        <a:effectLst/>
       </p:bgPr>
     </p:bg>
     <p:spTree>
@@ -8334,7 +7481,7 @@
           <a:bodyPr wrap="square" lIns="0" tIns="0" rIns="0" bIns="0" rtlCol="0" anchor="ctr"/>
           <a:lstStyle/>
           <a:p>
-            <a:pPr algn="ctr" indent="0" marL="0">
+            <a:pPr marL="0" indent="0" algn="ctr">
               <a:buNone/>
             </a:pPr>
             <a:r>
@@ -8373,7 +7520,7 @@
           <a:bodyPr wrap="square" lIns="0" tIns="0" rIns="0" bIns="0" rtlCol="0" anchor="ctr"/>
           <a:lstStyle/>
           <a:p>
-            <a:pPr algn="ctr" indent="0" marL="0">
+            <a:pPr marL="0" indent="0" algn="ctr">
               <a:lnSpc>
                 <a:spcPts val="3800"/>
               </a:lnSpc>
@@ -8393,7 +7540,7 @@
             <a:endParaRPr lang="en-US" sz="2200" dirty="0"/>
           </a:p>
           <a:p>
-            <a:pPr algn="ctr" indent="0" marL="0">
+            <a:pPr marL="0" indent="0" algn="ctr">
               <a:lnSpc>
                 <a:spcPts val="3800"/>
               </a:lnSpc>
@@ -8413,7 +7560,7 @@
             <a:endParaRPr lang="en-US" sz="2200" dirty="0"/>
           </a:p>
           <a:p>
-            <a:pPr algn="ctr" indent="0" marL="0">
+            <a:pPr marL="0" indent="0" algn="ctr">
               <a:lnSpc>
                 <a:spcPts val="3800"/>
               </a:lnSpc>
@@ -8458,6 +7605,13 @@
             <a:prstDash val="solid"/>
           </a:ln>
         </p:spPr>
+        <p:txBody>
+          <a:bodyPr/>
+          <a:lstStyle/>
+          <a:p>
+            <a:endParaRPr lang="en-US"/>
+          </a:p>
+        </p:txBody>
       </p:sp>
       <p:sp>
         <p:nvSpPr>
@@ -8480,7 +7634,7 @@
           <a:bodyPr wrap="square" lIns="0" tIns="0" rIns="0" bIns="0" rtlCol="0" anchor="ctr"/>
           <a:lstStyle/>
           <a:p>
-            <a:pPr algn="ctr" indent="0" marL="0">
+            <a:pPr marL="0" indent="0" algn="ctr">
               <a:buNone/>
             </a:pPr>
             <a:r>
@@ -8514,6 +7668,7 @@
         <a:solidFill>
           <a:srgbClr val="FFFFFF"/>
         </a:solidFill>
+        <a:effectLst/>
       </p:bgPr>
     </p:bg>
     <p:spTree>
@@ -8551,11 +7706,11 @@
           <a:bodyPr wrap="square" lIns="0" tIns="0" rIns="0" bIns="0" rtlCol="0" anchor="ctr"/>
           <a:lstStyle/>
           <a:p>
-            <a:pPr indent="0" marL="0">
+            <a:pPr marL="0" indent="0">
               <a:buNone/>
             </a:pPr>
             <a:r>
-              <a:rPr lang="en-US" sz="1100" b="1" spc="200" kern="0" dirty="0">
+              <a:rPr lang="en-US" sz="1100" b="1" kern="0" spc="200" dirty="0">
                 <a:solidFill>
                   <a:srgbClr val="E8A33D"/>
                 </a:solidFill>
@@ -8595,6 +7750,13 @@
             <a:prstDash val="solid"/>
           </a:ln>
         </p:spPr>
+        <p:txBody>
+          <a:bodyPr/>
+          <a:lstStyle/>
+          <a:p>
+            <a:endParaRPr lang="en-US"/>
+          </a:p>
+        </p:txBody>
       </p:sp>
       <p:sp>
         <p:nvSpPr>
@@ -8617,7 +7779,7 @@
           <a:bodyPr wrap="square" lIns="0" tIns="0" rIns="0" bIns="0" rtlCol="0" anchor="ctr"/>
           <a:lstStyle/>
           <a:p>
-            <a:pPr algn="ctr" indent="0" marL="0">
+            <a:pPr marL="0" indent="0" algn="ctr">
               <a:buNone/>
             </a:pPr>
             <a:r>
@@ -8659,6 +7821,13 @@
             <a:prstDash val="solid"/>
           </a:ln>
         </p:spPr>
+        <p:txBody>
+          <a:bodyPr/>
+          <a:lstStyle/>
+          <a:p>
+            <a:endParaRPr lang="en-US"/>
+          </a:p>
+        </p:txBody>
       </p:sp>
       <p:sp>
         <p:nvSpPr>
@@ -8681,7 +7850,7 @@
           <a:bodyPr wrap="square" lIns="0" tIns="0" rIns="0" bIns="0" rtlCol="0" anchor="ctr"/>
           <a:lstStyle/>
           <a:p>
-            <a:pPr indent="0" marL="0">
+            <a:pPr marL="0" indent="0">
               <a:buNone/>
             </a:pPr>
             <a:r>
@@ -8725,13 +7894,20 @@
             <a:prstDash val="solid"/>
           </a:ln>
           <a:effectLst>
-            <a:outerShdw sx="100000" sy="100000" kx="0" ky="0" algn="bl" rotWithShape="0" blurRad="101600" dist="25400" dir="5400000">
+            <a:outerShdw blurRad="101600" dist="25400" dir="5400000" algn="bl" rotWithShape="0">
               <a:srgbClr val="9AA7B4">
                 <a:alpha val="28000"/>
               </a:srgbClr>
             </a:outerShdw>
           </a:effectLst>
         </p:spPr>
+        <p:txBody>
+          <a:bodyPr/>
+          <a:lstStyle/>
+          <a:p>
+            <a:endParaRPr lang="en-US"/>
+          </a:p>
+        </p:txBody>
       </p:sp>
       <p:sp>
         <p:nvSpPr>
@@ -8754,7 +7930,7 @@
           <a:bodyPr wrap="square" lIns="0" tIns="0" rIns="0" bIns="0" rtlCol="0" anchor="ctr"/>
           <a:lstStyle/>
           <a:p>
-            <a:pPr indent="0" marL="0">
+            <a:pPr marL="0" indent="0">
               <a:buNone/>
             </a:pPr>
             <a:r>
@@ -8793,7 +7969,7 @@
           <a:bodyPr wrap="square" lIns="0" tIns="0" rIns="0" bIns="0" rtlCol="0" anchor="ctr"/>
           <a:lstStyle/>
           <a:p>
-            <a:pPr indent="0" marL="0">
+            <a:pPr marL="0" indent="0">
               <a:lnSpc>
                 <a:spcPts val="1500"/>
               </a:lnSpc>
@@ -8840,13 +8016,20 @@
             <a:prstDash val="solid"/>
           </a:ln>
           <a:effectLst>
-            <a:outerShdw sx="100000" sy="100000" kx="0" ky="0" algn="bl" rotWithShape="0" blurRad="101600" dist="25400" dir="5400000">
+            <a:outerShdw blurRad="101600" dist="25400" dir="5400000" algn="bl" rotWithShape="0">
               <a:srgbClr val="9AA7B4">
                 <a:alpha val="28000"/>
               </a:srgbClr>
             </a:outerShdw>
           </a:effectLst>
         </p:spPr>
+        <p:txBody>
+          <a:bodyPr/>
+          <a:lstStyle/>
+          <a:p>
+            <a:endParaRPr lang="en-US"/>
+          </a:p>
+        </p:txBody>
       </p:sp>
       <p:sp>
         <p:nvSpPr>
@@ -8869,7 +8052,7 @@
           <a:bodyPr wrap="square" lIns="0" tIns="0" rIns="0" bIns="0" rtlCol="0" anchor="ctr"/>
           <a:lstStyle/>
           <a:p>
-            <a:pPr indent="0" marL="0">
+            <a:pPr marL="0" indent="0">
               <a:buNone/>
             </a:pPr>
             <a:r>
@@ -8908,7 +8091,7 @@
           <a:bodyPr wrap="square" lIns="0" tIns="0" rIns="0" bIns="0" rtlCol="0" anchor="ctr"/>
           <a:lstStyle/>
           <a:p>
-            <a:pPr indent="0" marL="0">
+            <a:pPr marL="0" indent="0">
               <a:lnSpc>
                 <a:spcPts val="1500"/>
               </a:lnSpc>
@@ -8955,13 +8138,20 @@
             <a:prstDash val="solid"/>
           </a:ln>
           <a:effectLst>
-            <a:outerShdw sx="100000" sy="100000" kx="0" ky="0" algn="bl" rotWithShape="0" blurRad="101600" dist="25400" dir="5400000">
+            <a:outerShdw blurRad="101600" dist="25400" dir="5400000" algn="bl" rotWithShape="0">
               <a:srgbClr val="9AA7B4">
                 <a:alpha val="28000"/>
               </a:srgbClr>
             </a:outerShdw>
           </a:effectLst>
         </p:spPr>
+        <p:txBody>
+          <a:bodyPr/>
+          <a:lstStyle/>
+          <a:p>
+            <a:endParaRPr lang="en-US"/>
+          </a:p>
+        </p:txBody>
       </p:sp>
       <p:sp>
         <p:nvSpPr>
@@ -8984,7 +8174,7 @@
           <a:bodyPr wrap="square" lIns="0" tIns="0" rIns="0" bIns="0" rtlCol="0" anchor="ctr"/>
           <a:lstStyle/>
           <a:p>
-            <a:pPr indent="0" marL="0">
+            <a:pPr marL="0" indent="0">
               <a:buNone/>
             </a:pPr>
             <a:r>
@@ -9023,7 +8213,7 @@
           <a:bodyPr wrap="square" lIns="0" tIns="0" rIns="0" bIns="0" rtlCol="0" anchor="ctr"/>
           <a:lstStyle/>
           <a:p>
-            <a:pPr indent="0" marL="0">
+            <a:pPr marL="0" indent="0">
               <a:lnSpc>
                 <a:spcPts val="1500"/>
               </a:lnSpc>
@@ -9070,13 +8260,20 @@
             <a:prstDash val="solid"/>
           </a:ln>
           <a:effectLst>
-            <a:outerShdw sx="100000" sy="100000" kx="0" ky="0" algn="bl" rotWithShape="0" blurRad="101600" dist="25400" dir="5400000">
+            <a:outerShdw blurRad="101600" dist="25400" dir="5400000" algn="bl" rotWithShape="0">
               <a:srgbClr val="9AA7B4">
                 <a:alpha val="28000"/>
               </a:srgbClr>
             </a:outerShdw>
           </a:effectLst>
         </p:spPr>
+        <p:txBody>
+          <a:bodyPr/>
+          <a:lstStyle/>
+          <a:p>
+            <a:endParaRPr lang="en-US"/>
+          </a:p>
+        </p:txBody>
       </p:sp>
       <p:sp>
         <p:nvSpPr>
@@ -9099,7 +8296,7 @@
           <a:bodyPr wrap="square" lIns="0" tIns="0" rIns="0" bIns="0" rtlCol="0" anchor="ctr"/>
           <a:lstStyle/>
           <a:p>
-            <a:pPr indent="0" marL="0">
+            <a:pPr marL="0" indent="0">
               <a:buNone/>
             </a:pPr>
             <a:r>
@@ -9138,7 +8335,7 @@
           <a:bodyPr wrap="square" lIns="0" tIns="0" rIns="0" bIns="0" rtlCol="0" anchor="ctr"/>
           <a:lstStyle/>
           <a:p>
-            <a:pPr indent="0" marL="0">
+            <a:pPr marL="0" indent="0">
               <a:lnSpc>
                 <a:spcPts val="1500"/>
               </a:lnSpc>
@@ -9185,13 +8382,20 @@
             <a:prstDash val="solid"/>
           </a:ln>
           <a:effectLst>
-            <a:outerShdw sx="100000" sy="100000" kx="0" ky="0" algn="bl" rotWithShape="0" blurRad="101600" dist="25400" dir="5400000">
+            <a:outerShdw blurRad="101600" dist="25400" dir="5400000" algn="bl" rotWithShape="0">
               <a:srgbClr val="9AA7B4">
                 <a:alpha val="28000"/>
               </a:srgbClr>
             </a:outerShdw>
           </a:effectLst>
         </p:spPr>
+        <p:txBody>
+          <a:bodyPr/>
+          <a:lstStyle/>
+          <a:p>
+            <a:endParaRPr lang="en-US"/>
+          </a:p>
+        </p:txBody>
       </p:sp>
       <p:sp>
         <p:nvSpPr>
@@ -9214,7 +8418,7 @@
           <a:bodyPr wrap="square" lIns="0" tIns="0" rIns="0" bIns="0" rtlCol="0" anchor="ctr"/>
           <a:lstStyle/>
           <a:p>
-            <a:pPr indent="0" marL="0">
+            <a:pPr marL="0" indent="0">
               <a:buNone/>
             </a:pPr>
             <a:r>
@@ -9253,7 +8457,7 @@
           <a:bodyPr wrap="square" lIns="0" tIns="0" rIns="0" bIns="0" rtlCol="0" anchor="ctr"/>
           <a:lstStyle/>
           <a:p>
-            <a:pPr indent="0" marL="0">
+            <a:pPr marL="0" indent="0">
               <a:lnSpc>
                 <a:spcPts val="1500"/>
               </a:lnSpc>
@@ -9295,7 +8499,7 @@
           <a:bodyPr wrap="square" lIns="0" tIns="0" rIns="0" bIns="0" rtlCol="0" anchor="ctr"/>
           <a:lstStyle/>
           <a:p>
-            <a:pPr indent="0" marL="0">
+            <a:pPr marL="0" indent="0">
               <a:buNone/>
             </a:pPr>
             <a:r>
@@ -9329,6 +8533,7 @@
         <a:solidFill>
           <a:srgbClr val="FFFFFF"/>
         </a:solidFill>
+        <a:effectLst/>
       </p:bgPr>
     </p:bg>
     <p:spTree>
@@ -9366,11 +8571,11 @@
           <a:bodyPr wrap="square" lIns="0" tIns="0" rIns="0" bIns="0" rtlCol="0" anchor="ctr"/>
           <a:lstStyle/>
           <a:p>
-            <a:pPr indent="0" marL="0">
+            <a:pPr marL="0" indent="0">
               <a:buNone/>
             </a:pPr>
             <a:r>
-              <a:rPr lang="en-US" sz="1100" b="1" spc="200" kern="0" dirty="0">
+              <a:rPr lang="en-US" sz="1100" b="1" kern="0" spc="200" dirty="0">
                 <a:solidFill>
                   <a:srgbClr val="E8A33D"/>
                 </a:solidFill>
@@ -9410,6 +8615,13 @@
             <a:prstDash val="solid"/>
           </a:ln>
         </p:spPr>
+        <p:txBody>
+          <a:bodyPr/>
+          <a:lstStyle/>
+          <a:p>
+            <a:endParaRPr lang="en-US"/>
+          </a:p>
+        </p:txBody>
       </p:sp>
       <p:sp>
         <p:nvSpPr>
@@ -9432,7 +8644,7 @@
           <a:bodyPr wrap="square" lIns="0" tIns="0" rIns="0" bIns="0" rtlCol="0" anchor="ctr"/>
           <a:lstStyle/>
           <a:p>
-            <a:pPr algn="ctr" indent="0" marL="0">
+            <a:pPr marL="0" indent="0" algn="ctr">
               <a:buNone/>
             </a:pPr>
             <a:r>
@@ -9471,7 +8683,7 @@
           <a:bodyPr wrap="square" lIns="0" tIns="0" rIns="0" bIns="0" rtlCol="0" anchor="ctr"/>
           <a:lstStyle/>
           <a:p>
-            <a:pPr indent="0" marL="0">
+            <a:pPr marL="0" indent="0">
               <a:buNone/>
             </a:pPr>
             <a:r>
@@ -9513,6 +8725,13 @@
             <a:prstDash val="solid"/>
           </a:ln>
         </p:spPr>
+        <p:txBody>
+          <a:bodyPr/>
+          <a:lstStyle/>
+          <a:p>
+            <a:endParaRPr lang="en-US"/>
+          </a:p>
+        </p:txBody>
       </p:sp>
       <p:sp>
         <p:nvSpPr>
@@ -9535,7 +8754,7 @@
           <a:bodyPr wrap="square" lIns="0" tIns="0" rIns="0" bIns="0" rtlCol="0" anchor="ctr"/>
           <a:lstStyle/>
           <a:p>
-            <a:pPr algn="ctr" indent="0" marL="0">
+            <a:pPr marL="0" indent="0" algn="ctr">
               <a:buNone/>
             </a:pPr>
             <a:r>
@@ -9574,7 +8793,7 @@
           <a:bodyPr wrap="square" lIns="0" tIns="0" rIns="0" bIns="0" rtlCol="0" anchor="ctr"/>
           <a:lstStyle/>
           <a:p>
-            <a:pPr indent="0" marL="0">
+            <a:pPr marL="0" indent="0">
               <a:buNone/>
             </a:pPr>
             <a:r>
@@ -9616,6 +8835,13 @@
             <a:prstDash val="solid"/>
           </a:ln>
         </p:spPr>
+        <p:txBody>
+          <a:bodyPr/>
+          <a:lstStyle/>
+          <a:p>
+            <a:endParaRPr lang="en-US"/>
+          </a:p>
+        </p:txBody>
       </p:sp>
       <p:sp>
         <p:nvSpPr>
@@ -9638,7 +8864,7 @@
           <a:bodyPr wrap="square" lIns="0" tIns="0" rIns="0" bIns="0" rtlCol="0" anchor="ctr"/>
           <a:lstStyle/>
           <a:p>
-            <a:pPr algn="ctr" indent="0" marL="0">
+            <a:pPr marL="0" indent="0" algn="ctr">
               <a:buNone/>
             </a:pPr>
             <a:r>
@@ -9677,7 +8903,7 @@
           <a:bodyPr wrap="square" lIns="0" tIns="0" rIns="0" bIns="0" rtlCol="0" anchor="ctr"/>
           <a:lstStyle/>
           <a:p>
-            <a:pPr indent="0" marL="0">
+            <a:pPr marL="0" indent="0">
               <a:buNone/>
             </a:pPr>
             <a:r>
@@ -9719,6 +8945,13 @@
             <a:prstDash val="solid"/>
           </a:ln>
         </p:spPr>
+        <p:txBody>
+          <a:bodyPr/>
+          <a:lstStyle/>
+          <a:p>
+            <a:endParaRPr lang="en-US"/>
+          </a:p>
+        </p:txBody>
       </p:sp>
       <p:sp>
         <p:nvSpPr>
@@ -9741,7 +8974,7 @@
           <a:bodyPr wrap="square" lIns="0" tIns="0" rIns="0" bIns="0" rtlCol="0" anchor="ctr"/>
           <a:lstStyle/>
           <a:p>
-            <a:pPr algn="ctr" indent="0" marL="0">
+            <a:pPr marL="0" indent="0" algn="ctr">
               <a:buNone/>
             </a:pPr>
             <a:r>
@@ -9780,7 +9013,7 @@
           <a:bodyPr wrap="square" lIns="0" tIns="0" rIns="0" bIns="0" rtlCol="0" anchor="ctr"/>
           <a:lstStyle/>
           <a:p>
-            <a:pPr indent="0" marL="0">
+            <a:pPr marL="0" indent="0">
               <a:buNone/>
             </a:pPr>
             <a:r>
@@ -9822,6 +9055,13 @@
             <a:prstDash val="solid"/>
           </a:ln>
         </p:spPr>
+        <p:txBody>
+          <a:bodyPr/>
+          <a:lstStyle/>
+          <a:p>
+            <a:endParaRPr lang="en-US"/>
+          </a:p>
+        </p:txBody>
       </p:sp>
       <p:sp>
         <p:nvSpPr>
@@ -9844,7 +9084,7 @@
           <a:bodyPr wrap="square" lIns="0" tIns="0" rIns="0" bIns="0" rtlCol="0" anchor="ctr"/>
           <a:lstStyle/>
           <a:p>
-            <a:pPr indent="0" marL="0">
+            <a:pPr marL="0" indent="0">
               <a:buNone/>
             </a:pPr>
             <a:r>
@@ -9888,13 +9128,20 @@
             <a:prstDash val="solid"/>
           </a:ln>
           <a:effectLst>
-            <a:outerShdw sx="100000" sy="100000" kx="0" ky="0" algn="bl" rotWithShape="0" blurRad="101600" dist="25400" dir="5400000">
+            <a:outerShdw blurRad="101600" dist="25400" dir="5400000" algn="bl" rotWithShape="0">
               <a:srgbClr val="9AA7B4">
                 <a:alpha val="28000"/>
               </a:srgbClr>
             </a:outerShdw>
           </a:effectLst>
         </p:spPr>
+        <p:txBody>
+          <a:bodyPr/>
+          <a:lstStyle/>
+          <a:p>
+            <a:endParaRPr lang="en-US"/>
+          </a:p>
+        </p:txBody>
       </p:sp>
       <p:sp>
         <p:nvSpPr>
@@ -9917,11 +9164,11 @@
           <a:bodyPr wrap="square" lIns="0" tIns="0" rIns="0" bIns="0" rtlCol="0" anchor="ctr"/>
           <a:lstStyle/>
           <a:p>
-            <a:pPr indent="0" marL="0">
+            <a:pPr marL="0" indent="0">
               <a:buNone/>
             </a:pPr>
             <a:r>
-              <a:rPr lang="en-US" sz="1050" b="1" spc="200" kern="0" dirty="0">
+              <a:rPr lang="en-US" sz="1050" b="1" kern="0" spc="200" dirty="0">
                 <a:solidFill>
                   <a:srgbClr val="2E7D8F"/>
                 </a:solidFill>
@@ -9956,7 +9203,7 @@
           <a:bodyPr wrap="square" lIns="0" tIns="0" rIns="0" bIns="0" rtlCol="0" anchor="ctr"/>
           <a:lstStyle/>
           <a:p>
-            <a:pPr indent="0" marL="0">
+            <a:pPr marL="0" indent="0">
               <a:lnSpc>
                 <a:spcPts val="1800"/>
               </a:lnSpc>
@@ -9998,7 +9245,7 @@
           <a:bodyPr wrap="square" lIns="0" tIns="0" rIns="0" bIns="0" rtlCol="0" anchor="ctr"/>
           <a:lstStyle/>
           <a:p>
-            <a:pPr indent="0" marL="0">
+            <a:pPr marL="0" indent="0">
               <a:lnSpc>
                 <a:spcPts val="1900"/>
               </a:lnSpc>
@@ -10018,7 +9265,7 @@
             <a:endParaRPr lang="en-US" sz="1250" dirty="0"/>
           </a:p>
           <a:p>
-            <a:pPr indent="0" marL="0">
+            <a:pPr marL="0" indent="0">
               <a:lnSpc>
                 <a:spcPts val="1900"/>
               </a:lnSpc>
@@ -10038,7 +9285,7 @@
             <a:endParaRPr lang="en-US" sz="1250" dirty="0"/>
           </a:p>
           <a:p>
-            <a:pPr indent="0" marL="0">
+            <a:pPr marL="0" indent="0">
               <a:lnSpc>
                 <a:spcPts val="1900"/>
               </a:lnSpc>
@@ -10058,7 +9305,7 @@
             <a:endParaRPr lang="en-US" sz="1250" dirty="0"/>
           </a:p>
           <a:p>
-            <a:pPr indent="0" marL="0">
+            <a:pPr marL="0" indent="0">
               <a:lnSpc>
                 <a:spcPts val="1900"/>
               </a:lnSpc>
@@ -10100,7 +9347,7 @@
           <a:bodyPr wrap="square" lIns="0" tIns="0" rIns="0" bIns="0" rtlCol="0" anchor="ctr"/>
           <a:lstStyle/>
           <a:p>
-            <a:pPr indent="0" marL="0">
+            <a:pPr marL="0" indent="0">
               <a:buNone/>
             </a:pPr>
             <a:r>
@@ -10144,13 +9391,20 @@
             <a:prstDash val="solid"/>
           </a:ln>
           <a:effectLst>
-            <a:outerShdw sx="100000" sy="100000" kx="0" ky="0" algn="bl" rotWithShape="0" blurRad="101600" dist="25400" dir="5400000">
+            <a:outerShdw blurRad="101600" dist="25400" dir="5400000" algn="bl" rotWithShape="0">
               <a:srgbClr val="9AA7B4">
                 <a:alpha val="28000"/>
               </a:srgbClr>
             </a:outerShdw>
           </a:effectLst>
         </p:spPr>
+        <p:txBody>
+          <a:bodyPr/>
+          <a:lstStyle/>
+          <a:p>
+            <a:endParaRPr lang="en-US"/>
+          </a:p>
+        </p:txBody>
       </p:sp>
       <p:sp>
         <p:nvSpPr>
@@ -10173,7 +9427,7 @@
           <a:bodyPr wrap="square" lIns="0" tIns="0" rIns="0" bIns="0" rtlCol="0" anchor="ctr"/>
           <a:lstStyle/>
           <a:p>
-            <a:pPr indent="0" marL="0">
+            <a:pPr marL="0" indent="0">
               <a:buNone/>
             </a:pPr>
             <a:r>
@@ -10212,7 +9466,7 @@
           <a:bodyPr wrap="square" lIns="0" tIns="0" rIns="0" bIns="0" rtlCol="0" anchor="ctr"/>
           <a:lstStyle/>
           <a:p>
-            <a:pPr indent="0" marL="0">
+            <a:pPr marL="0" indent="0">
               <a:buNone/>
             </a:pPr>
             <a:r>
@@ -10531,4 +9785,319 @@
     </a:ext>
   </a:extLst>
 </a:theme>
+</file>
+
+<file path=ppt/theme/theme2.xml><?xml version="1.0" encoding="utf-8"?>
+<a:theme xmlns:a="http://schemas.openxmlformats.org/drawingml/2006/main" name="Office Theme">
+  <a:themeElements>
+    <a:clrScheme name="Office">
+      <a:dk1>
+        <a:sysClr val="windowText" lastClr="000000"/>
+      </a:dk1>
+      <a:lt1>
+        <a:sysClr val="window" lastClr="FFFFFF"/>
+      </a:lt1>
+      <a:dk2>
+        <a:srgbClr val="0E2841"/>
+      </a:dk2>
+      <a:lt2>
+        <a:srgbClr val="E8E8E8"/>
+      </a:lt2>
+      <a:accent1>
+        <a:srgbClr val="156082"/>
+      </a:accent1>
+      <a:accent2>
+        <a:srgbClr val="E97132"/>
+      </a:accent2>
+      <a:accent3>
+        <a:srgbClr val="196B24"/>
+      </a:accent3>
+      <a:accent4>
+        <a:srgbClr val="0F9ED5"/>
+      </a:accent4>
+      <a:accent5>
+        <a:srgbClr val="A02B93"/>
+      </a:accent5>
+      <a:accent6>
+        <a:srgbClr val="4EA72E"/>
+      </a:accent6>
+      <a:hlink>
+        <a:srgbClr val="467886"/>
+      </a:hlink>
+      <a:folHlink>
+        <a:srgbClr val="96607D"/>
+      </a:folHlink>
+    </a:clrScheme>
+    <a:fontScheme name="Office">
+      <a:majorFont>
+        <a:latin typeface="Aptos Display" panose="02110004020202020204"/>
+        <a:ea typeface=""/>
+        <a:cs typeface=""/>
+        <a:font script="Jpan" typeface="游ゴシック Light"/>
+        <a:font script="Hang" typeface="맑은 고딕"/>
+        <a:font script="Hans" typeface="等线 Light"/>
+        <a:font script="Hant" typeface="新細明體"/>
+        <a:font script="Arab" typeface="Times New Roman"/>
+        <a:font script="Hebr" typeface="Times New Roman"/>
+        <a:font script="Thai" typeface="Angsana New"/>
+        <a:font script="Ethi" typeface="Nyala"/>
+        <a:font script="Beng" typeface="Vrinda"/>
+        <a:font script="Gujr" typeface="Shruti"/>
+        <a:font script="Khmr" typeface="MoolBoran"/>
+        <a:font script="Knda" typeface="Tunga"/>
+        <a:font script="Guru" typeface="Raavi"/>
+        <a:font script="Cans" typeface="Euphemia"/>
+        <a:font script="Cher" typeface="Plantagenet Cherokee"/>
+        <a:font script="Yiii" typeface="Microsoft Yi Baiti"/>
+        <a:font script="Tibt" typeface="Microsoft Himalaya"/>
+        <a:font script="Thaa" typeface="MV Boli"/>
+        <a:font script="Deva" typeface="Mangal"/>
+        <a:font script="Telu" typeface="Gautami"/>
+        <a:font script="Taml" typeface="Latha"/>
+        <a:font script="Syrc" typeface="Estrangelo Edessa"/>
+        <a:font script="Orya" typeface="Kalinga"/>
+        <a:font script="Mlym" typeface="Kartika"/>
+        <a:font script="Laoo" typeface="DokChampa"/>
+        <a:font script="Sinh" typeface="Iskoola Pota"/>
+        <a:font script="Mong" typeface="Mongolian Baiti"/>
+        <a:font script="Viet" typeface="Times New Roman"/>
+        <a:font script="Uigh" typeface="Microsoft Uighur"/>
+        <a:font script="Geor" typeface="Sylfaen"/>
+        <a:font script="Armn" typeface="Arial"/>
+        <a:font script="Bugi" typeface="Leelawadee UI"/>
+        <a:font script="Bopo" typeface="Microsoft JhengHei"/>
+        <a:font script="Java" typeface="Javanese Text"/>
+        <a:font script="Lisu" typeface="Segoe UI"/>
+        <a:font script="Mymr" typeface="Myanmar Text"/>
+        <a:font script="Nkoo" typeface="Ebrima"/>
+        <a:font script="Olck" typeface="Nirmala UI"/>
+        <a:font script="Osma" typeface="Ebrima"/>
+        <a:font script="Phag" typeface="Phagspa"/>
+        <a:font script="Syrn" typeface="Estrangelo Edessa"/>
+        <a:font script="Syrj" typeface="Estrangelo Edessa"/>
+        <a:font script="Syre" typeface="Estrangelo Edessa"/>
+        <a:font script="Sora" typeface="Nirmala UI"/>
+        <a:font script="Tale" typeface="Microsoft Tai Le"/>
+        <a:font script="Talu" typeface="Microsoft New Tai Lue"/>
+        <a:font script="Tfng" typeface="Ebrima"/>
+      </a:majorFont>
+      <a:minorFont>
+        <a:latin typeface="Aptos" panose="02110004020202020204"/>
+        <a:ea typeface=""/>
+        <a:cs typeface=""/>
+        <a:font script="Jpan" typeface="游ゴシック"/>
+        <a:font script="Hang" typeface="맑은 고딕"/>
+        <a:font script="Hans" typeface="等线"/>
+        <a:font script="Hant" typeface="新細明體"/>
+        <a:font script="Arab" typeface="Arial"/>
+        <a:font script="Hebr" typeface="Arial"/>
+        <a:font script="Thai" typeface="Cordia New"/>
+        <a:font script="Ethi" typeface="Nyala"/>
+        <a:font script="Beng" typeface="Vrinda"/>
+        <a:font script="Gujr" typeface="Shruti"/>
+        <a:font script="Khmr" typeface="DaunPenh"/>
+        <a:font script="Knda" typeface="Tunga"/>
+        <a:font script="Guru" typeface="Raavi"/>
+        <a:font script="Cans" typeface="Euphemia"/>
+        <a:font script="Cher" typeface="Plantagenet Cherokee"/>
+        <a:font script="Yiii" typeface="Microsoft Yi Baiti"/>
+        <a:font script="Tibt" typeface="Microsoft Himalaya"/>
+        <a:font script="Thaa" typeface="MV Boli"/>
+        <a:font script="Deva" typeface="Mangal"/>
+        <a:font script="Telu" typeface="Gautami"/>
+        <a:font script="Taml" typeface="Latha"/>
+        <a:font script="Syrc" typeface="Estrangelo Edessa"/>
+        <a:font script="Orya" typeface="Kalinga"/>
+        <a:font script="Mlym" typeface="Kartika"/>
+        <a:font script="Laoo" typeface="DokChampa"/>
+        <a:font script="Sinh" typeface="Iskoola Pota"/>
+        <a:font script="Mong" typeface="Mongolian Baiti"/>
+        <a:font script="Viet" typeface="Arial"/>
+        <a:font script="Uigh" typeface="Microsoft Uighur"/>
+        <a:font script="Geor" typeface="Sylfaen"/>
+        <a:font script="Armn" typeface="Arial"/>
+        <a:font script="Bugi" typeface="Leelawadee UI"/>
+        <a:font script="Bopo" typeface="Microsoft JhengHei"/>
+        <a:font script="Java" typeface="Javanese Text"/>
+        <a:font script="Lisu" typeface="Segoe UI"/>
+        <a:font script="Mymr" typeface="Myanmar Text"/>
+        <a:font script="Nkoo" typeface="Ebrima"/>
+        <a:font script="Olck" typeface="Nirmala UI"/>
+        <a:font script="Osma" typeface="Ebrima"/>
+        <a:font script="Phag" typeface="Phagspa"/>
+        <a:font script="Syrn" typeface="Estrangelo Edessa"/>
+        <a:font script="Syrj" typeface="Estrangelo Edessa"/>
+        <a:font script="Syre" typeface="Estrangelo Edessa"/>
+        <a:font script="Sora" typeface="Nirmala UI"/>
+        <a:font script="Tale" typeface="Microsoft Tai Le"/>
+        <a:font script="Talu" typeface="Microsoft New Tai Lue"/>
+        <a:font script="Tfng" typeface="Ebrima"/>
+      </a:minorFont>
+    </a:fontScheme>
+    <a:fmtScheme name="Office">
+      <a:fillStyleLst>
+        <a:solidFill>
+          <a:schemeClr val="phClr"/>
+        </a:solidFill>
+        <a:gradFill rotWithShape="1">
+          <a:gsLst>
+            <a:gs pos="0">
+              <a:schemeClr val="phClr">
+                <a:lumMod val="110000"/>
+                <a:satMod val="105000"/>
+                <a:tint val="67000"/>
+              </a:schemeClr>
+            </a:gs>
+            <a:gs pos="50000">
+              <a:schemeClr val="phClr">
+                <a:lumMod val="105000"/>
+                <a:satMod val="103000"/>
+                <a:tint val="73000"/>
+              </a:schemeClr>
+            </a:gs>
+            <a:gs pos="100000">
+              <a:schemeClr val="phClr">
+                <a:lumMod val="105000"/>
+                <a:satMod val="109000"/>
+                <a:tint val="81000"/>
+              </a:schemeClr>
+            </a:gs>
+          </a:gsLst>
+          <a:lin ang="5400000" scaled="0"/>
+        </a:gradFill>
+        <a:gradFill rotWithShape="1">
+          <a:gsLst>
+            <a:gs pos="0">
+              <a:schemeClr val="phClr">
+                <a:satMod val="103000"/>
+                <a:lumMod val="102000"/>
+                <a:tint val="94000"/>
+              </a:schemeClr>
+            </a:gs>
+            <a:gs pos="50000">
+              <a:schemeClr val="phClr">
+                <a:satMod val="110000"/>
+                <a:lumMod val="100000"/>
+                <a:shade val="100000"/>
+              </a:schemeClr>
+            </a:gs>
+            <a:gs pos="100000">
+              <a:schemeClr val="phClr">
+                <a:lumMod val="99000"/>
+                <a:satMod val="120000"/>
+                <a:shade val="78000"/>
+              </a:schemeClr>
+            </a:gs>
+          </a:gsLst>
+          <a:lin ang="5400000" scaled="0"/>
+        </a:gradFill>
+      </a:fillStyleLst>
+      <a:lnStyleLst>
+        <a:ln w="12700" cap="flat" cmpd="sng" algn="ctr">
+          <a:solidFill>
+            <a:schemeClr val="phClr"/>
+          </a:solidFill>
+          <a:prstDash val="solid"/>
+          <a:miter lim="800000"/>
+        </a:ln>
+        <a:ln w="19050" cap="flat" cmpd="sng" algn="ctr">
+          <a:solidFill>
+            <a:schemeClr val="phClr"/>
+          </a:solidFill>
+          <a:prstDash val="solid"/>
+          <a:miter lim="800000"/>
+        </a:ln>
+        <a:ln w="25400" cap="flat" cmpd="sng" algn="ctr">
+          <a:solidFill>
+            <a:schemeClr val="phClr"/>
+          </a:solidFill>
+          <a:prstDash val="solid"/>
+          <a:miter lim="800000"/>
+        </a:ln>
+      </a:lnStyleLst>
+      <a:effectStyleLst>
+        <a:effectStyle>
+          <a:effectLst/>
+        </a:effectStyle>
+        <a:effectStyle>
+          <a:effectLst/>
+        </a:effectStyle>
+        <a:effectStyle>
+          <a:effectLst>
+            <a:outerShdw blurRad="57150" dist="19050" dir="5400000" algn="ctr" rotWithShape="0">
+              <a:srgbClr val="000000">
+                <a:alpha val="63000"/>
+              </a:srgbClr>
+            </a:outerShdw>
+          </a:effectLst>
+        </a:effectStyle>
+      </a:effectStyleLst>
+      <a:bgFillStyleLst>
+        <a:solidFill>
+          <a:schemeClr val="phClr"/>
+        </a:solidFill>
+        <a:solidFill>
+          <a:schemeClr val="phClr">
+            <a:tint val="95000"/>
+            <a:satMod val="170000"/>
+          </a:schemeClr>
+        </a:solidFill>
+        <a:gradFill rotWithShape="1">
+          <a:gsLst>
+            <a:gs pos="0">
+              <a:schemeClr val="phClr">
+                <a:tint val="93000"/>
+                <a:satMod val="150000"/>
+                <a:shade val="98000"/>
+                <a:lumMod val="102000"/>
+              </a:schemeClr>
+            </a:gs>
+            <a:gs pos="50000">
+              <a:schemeClr val="phClr">
+                <a:tint val="98000"/>
+                <a:satMod val="130000"/>
+                <a:shade val="90000"/>
+                <a:lumMod val="103000"/>
+              </a:schemeClr>
+            </a:gs>
+            <a:gs pos="100000">
+              <a:schemeClr val="phClr">
+                <a:shade val="63000"/>
+                <a:satMod val="120000"/>
+              </a:schemeClr>
+            </a:gs>
+          </a:gsLst>
+          <a:lin ang="5400000" scaled="0"/>
+        </a:gradFill>
+      </a:bgFillStyleLst>
+    </a:fmtScheme>
+  </a:themeElements>
+  <a:objectDefaults>
+    <a:lnDef>
+      <a:spPr/>
+      <a:bodyPr/>
+      <a:lstStyle/>
+      <a:style>
+        <a:lnRef idx="2">
+          <a:schemeClr val="accent1"/>
+        </a:lnRef>
+        <a:fillRef idx="0">
+          <a:schemeClr val="accent1"/>
+        </a:fillRef>
+        <a:effectRef idx="1">
+          <a:schemeClr val="accent1"/>
+        </a:effectRef>
+        <a:fontRef idx="minor">
+          <a:schemeClr val="tx1"/>
+        </a:fontRef>
+      </a:style>
+    </a:lnDef>
+  </a:objectDefaults>
+  <a:extraClrSchemeLst/>
+  <a:extLst>
+    <a:ext uri="{05A4C25C-085E-4340-85A3-A5531E510DB2}">
+      <thm15:themeFamily xmlns:thm15="http://schemas.microsoft.com/office/thememl/2012/main" name="Office Theme" id="{2E142A2C-CD16-42D6-873A-C26D2A0506FA}" vid="{1BDDFF52-6CD6-40A5-AB3C-68EB2F1E4D0A}"/>
+    </a:ext>
+  </a:extLst>
+</a:theme>
 </file>